--- a/Presentations/Module_5_BOM_View_Model_Presentation.pptx
+++ b/Presentations/Module_5_BOM_View_Model_Presentation.pptx
@@ -2,23 +2,26 @@
 <file path=ppt/presentation.xml><?xml version="1.0" encoding="utf-8"?>
 <p:presentation xmlns:p="http://schemas.openxmlformats.org/presentationml/2006/main">
   <p:sldMasterIdLst>
-    <p:sldMasterId xmlns:r="http://schemas.openxmlformats.org/officeDocument/2006/relationships" id="2147483648" r:id="Raea2a1d0e74447e4"/>
+    <p:sldMasterId xmlns:r="http://schemas.openxmlformats.org/officeDocument/2006/relationships" id="2147483648" r:id="R65c74e162336491f"/>
   </p:sldMasterIdLst>
   <p:notesMasterIdLst>
-    <p:notesMasterId xmlns:r="http://schemas.openxmlformats.org/officeDocument/2006/relationships" r:id="R28ee1a2fe75a4c5a"/>
+    <p:notesMasterId xmlns:r="http://schemas.openxmlformats.org/officeDocument/2006/relationships" r:id="R3e5146cb7db24fda"/>
   </p:notesMasterIdLst>
   <p:sldIdLst>
-    <p:sldId xmlns:r="http://schemas.openxmlformats.org/officeDocument/2006/relationships" id="256" r:id="R84c224b32df04e12"/>
-    <p:sldId xmlns:r="http://schemas.openxmlformats.org/officeDocument/2006/relationships" id="257" r:id="R082b6acc0d274722"/>
-    <p:sldId xmlns:r="http://schemas.openxmlformats.org/officeDocument/2006/relationships" id="258" r:id="Rc17bee76567d4663"/>
-    <p:sldId xmlns:r="http://schemas.openxmlformats.org/officeDocument/2006/relationships" id="259" r:id="R2b21c03e9b544a0f"/>
-    <p:sldId xmlns:r="http://schemas.openxmlformats.org/officeDocument/2006/relationships" id="260" r:id="R1a96f870f2b04a4e"/>
-    <p:sldId xmlns:r="http://schemas.openxmlformats.org/officeDocument/2006/relationships" id="261" r:id="R40a732e9cbb24240"/>
-    <p:sldId xmlns:r="http://schemas.openxmlformats.org/officeDocument/2006/relationships" id="262" r:id="R69e6a4c5335a4cad"/>
-    <p:sldId xmlns:r="http://schemas.openxmlformats.org/officeDocument/2006/relationships" id="263" r:id="R82b9aa020d7e44b0"/>
-    <p:sldId xmlns:r="http://schemas.openxmlformats.org/officeDocument/2006/relationships" id="264" r:id="Rcf40ce1b9e0147a6"/>
-    <p:sldId xmlns:r="http://schemas.openxmlformats.org/officeDocument/2006/relationships" id="265" r:id="R2374fbb7f1cb432b"/>
-    <p:sldId xmlns:r="http://schemas.openxmlformats.org/officeDocument/2006/relationships" id="266" r:id="R55a1baacefa344d0"/>
+    <p:sldId xmlns:r="http://schemas.openxmlformats.org/officeDocument/2006/relationships" id="256" r:id="R46a57fbd1bd94a9a"/>
+    <p:sldId xmlns:r="http://schemas.openxmlformats.org/officeDocument/2006/relationships" id="257" r:id="Re1be2b05bda04560"/>
+    <p:sldId xmlns:r="http://schemas.openxmlformats.org/officeDocument/2006/relationships" id="258" r:id="Ra46356b2d6bc4af5"/>
+    <p:sldId xmlns:r="http://schemas.openxmlformats.org/officeDocument/2006/relationships" id="259" r:id="Rce89727c28fe4ab0"/>
+    <p:sldId xmlns:r="http://schemas.openxmlformats.org/officeDocument/2006/relationships" id="260" r:id="R7e81e4f5d97f49fc"/>
+    <p:sldId xmlns:r="http://schemas.openxmlformats.org/officeDocument/2006/relationships" id="261" r:id="R7ae57eaf332648c9"/>
+    <p:sldId xmlns:r="http://schemas.openxmlformats.org/officeDocument/2006/relationships" id="262" r:id="Rd47e0ee4c3e44373"/>
+    <p:sldId xmlns:r="http://schemas.openxmlformats.org/officeDocument/2006/relationships" id="263" r:id="Rb49e6afaab9c4908"/>
+    <p:sldId xmlns:r="http://schemas.openxmlformats.org/officeDocument/2006/relationships" id="264" r:id="R9c05852e3f284efb"/>
+    <p:sldId xmlns:r="http://schemas.openxmlformats.org/officeDocument/2006/relationships" id="265" r:id="R0ab07ddbb0ba4d19"/>
+    <p:sldId xmlns:r="http://schemas.openxmlformats.org/officeDocument/2006/relationships" id="266" r:id="R7f71a17f45ad446a"/>
+    <p:sldId xmlns:r="http://schemas.openxmlformats.org/officeDocument/2006/relationships" id="267" r:id="R813a49497d884a5c"/>
+    <p:sldId xmlns:r="http://schemas.openxmlformats.org/officeDocument/2006/relationships" id="268" r:id="R181b4d1708a44dc8"/>
+    <p:sldId xmlns:r="http://schemas.openxmlformats.org/officeDocument/2006/relationships" id="269" r:id="R4fdfef8dc7f743f5"/>
   </p:sldIdLst>
   <p:sldSz cx="12192000" cy="6858000"/>
   <p:notesSz cx="6858000" cy="9144000"/>
@@ -579,7 +582,7 @@
           <a:lstStyle xmlns:a="http://schemas.openxmlformats.org/drawingml/2006/main"/>
           <a:p xmlns:a="http://schemas.openxmlformats.org/drawingml/2006/main">
             <a:r>
-              <a:t>Introduce Module 5. Open the matching Word tutorial after the exercise overview.</a:t>
+              <a:t>Open the matching Word tutorial after the exercise overview. Source: Module 5 Word tutorial.</a:t>
             </a:r>
           </a:p>
         </p:txBody>
@@ -649,7 +652,7 @@
           <a:lstStyle xmlns:a="http://schemas.openxmlformats.org/drawingml/2006/main"/>
           <a:p xmlns:a="http://schemas.openxmlformats.org/drawingml/2006/main">
             <a:r>
-              <a:t>After tutorial Step 5: run the app or inspect the code. Ask students to explain the observed result. Source: Module 5 Word tutorial.</a:t>
+              <a:t>After tutorial Step 4: run the app or inspect the code. Ask students to explain the observed result. Source: Module 5 Word tutorial.</a:t>
             </a:r>
           </a:p>
         </p:txBody>
@@ -719,7 +722,217 @@
           <a:lstStyle xmlns:a="http://schemas.openxmlformats.org/drawingml/2006/main"/>
           <a:p xmlns:a="http://schemas.openxmlformats.org/drawingml/2006/main">
             <a:r>
+              <a:t>Before tutorial Step 5: explain these concepts. Ask students to predict what the change will do. Then open Step 5 in the Word tutorial. Source: Module 5 Word tutorial. Related MAUI documentation: https://learn.microsoft.com/dotnet/maui/fundamentals/data-binding/basic-bindings</a:t>
+            </a:r>
+          </a:p>
+        </p:txBody>
+      </p:sp>
+      <p:sp>
+        <p:nvSpPr>
+          <p:cNvPr id="4" name="Slide Number Placeholder 3"/>
+          <p:cNvSpPr>
+            <a:spLocks xmlns:a="http://schemas.openxmlformats.org/drawingml/2006/main" noGrp="1"/>
+          </p:cNvSpPr>
+          <p:nvPr>
+            <p:ph type="sldNum" idx="5"/>
+          </p:nvPr>
+        </p:nvSpPr>
+        <p:spPr/>
+        <p:txBody>
+          <a:bodyPr xmlns:a="http://schemas.openxmlformats.org/drawingml/2006/main"/>
+          <a:lstStyle xmlns:a="http://schemas.openxmlformats.org/drawingml/2006/main"/>
+          <a:p xmlns:a="http://schemas.openxmlformats.org/drawingml/2006/main"/>
+        </p:txBody>
+      </p:sp>
+    </p:spTree>
+  </p:cSld>
+  <p:clrMapOvr>
+    <a:masterClrMapping xmlns:a="http://schemas.openxmlformats.org/drawingml/2006/main"/>
+  </p:clrMapOvr>
+</p:notes>
+</file>
+
+<file path=ppt/notesSlides/notesSlide12.xml><?xml version="1.0" encoding="utf-8"?>
+<p:notes xmlns:p="http://schemas.openxmlformats.org/presentationml/2006/main">
+  <p:cSld>
+    <p:spTree>
+      <p:nvGrpSpPr>
+        <p:cNvPr id="1" name=""/>
+        <p:cNvGrpSpPr/>
+        <p:nvPr/>
+      </p:nvGrpSpPr>
+      <p:grpSpPr>
+        <a:xfrm xmlns:a="http://schemas.openxmlformats.org/drawingml/2006/main"/>
+      </p:grpSpPr>
+      <p:sp>
+        <p:nvSpPr>
+          <p:cNvPr id="2" name="Slide Image Placeholder 1"/>
+          <p:cNvSpPr>
+            <a:spLocks xmlns:a="http://schemas.openxmlformats.org/drawingml/2006/main" noGrp="1"/>
+          </p:cNvSpPr>
+          <p:nvPr>
+            <p:ph type="sldImg" idx="0"/>
+          </p:nvPr>
+        </p:nvSpPr>
+        <p:spPr/>
+      </p:sp>
+      <p:sp>
+        <p:nvSpPr>
+          <p:cNvPr id="3" name="Notes Placeholder 2"/>
+          <p:cNvSpPr>
+            <a:spLocks xmlns:a="http://schemas.openxmlformats.org/drawingml/2006/main" noGrp="1"/>
+          </p:cNvSpPr>
+          <p:nvPr>
+            <p:ph type="body" idx="1"/>
+          </p:nvPr>
+        </p:nvSpPr>
+        <p:spPr/>
+        <p:txBody>
+          <a:bodyPr xmlns:a="http://schemas.openxmlformats.org/drawingml/2006/main"/>
+          <a:lstStyle xmlns:a="http://schemas.openxmlformats.org/drawingml/2006/main"/>
+          <a:p xmlns:a="http://schemas.openxmlformats.org/drawingml/2006/main">
+            <a:r>
+              <a:t>After tutorial Step 5: run the app or inspect the code. Ask students to explain the observed result. Source: Module 5 Word tutorial.</a:t>
+            </a:r>
+          </a:p>
+        </p:txBody>
+      </p:sp>
+      <p:sp>
+        <p:nvSpPr>
+          <p:cNvPr id="4" name="Slide Number Placeholder 3"/>
+          <p:cNvSpPr>
+            <a:spLocks xmlns:a="http://schemas.openxmlformats.org/drawingml/2006/main" noGrp="1"/>
+          </p:cNvSpPr>
+          <p:nvPr>
+            <p:ph type="sldNum" idx="5"/>
+          </p:nvPr>
+        </p:nvSpPr>
+        <p:spPr/>
+        <p:txBody>
+          <a:bodyPr xmlns:a="http://schemas.openxmlformats.org/drawingml/2006/main"/>
+          <a:lstStyle xmlns:a="http://schemas.openxmlformats.org/drawingml/2006/main"/>
+          <a:p xmlns:a="http://schemas.openxmlformats.org/drawingml/2006/main"/>
+        </p:txBody>
+      </p:sp>
+    </p:spTree>
+  </p:cSld>
+  <p:clrMapOvr>
+    <a:masterClrMapping xmlns:a="http://schemas.openxmlformats.org/drawingml/2006/main"/>
+  </p:clrMapOvr>
+</p:notes>
+</file>
+
+<file path=ppt/notesSlides/notesSlide13.xml><?xml version="1.0" encoding="utf-8"?>
+<p:notes xmlns:p="http://schemas.openxmlformats.org/presentationml/2006/main">
+  <p:cSld>
+    <p:spTree>
+      <p:nvGrpSpPr>
+        <p:cNvPr id="1" name=""/>
+        <p:cNvGrpSpPr/>
+        <p:nvPr/>
+      </p:nvGrpSpPr>
+      <p:grpSpPr>
+        <a:xfrm xmlns:a="http://schemas.openxmlformats.org/drawingml/2006/main"/>
+      </p:grpSpPr>
+      <p:sp>
+        <p:nvSpPr>
+          <p:cNvPr id="2" name="Slide Image Placeholder 1"/>
+          <p:cNvSpPr>
+            <a:spLocks xmlns:a="http://schemas.openxmlformats.org/drawingml/2006/main" noGrp="1"/>
+          </p:cNvSpPr>
+          <p:nvPr>
+            <p:ph type="sldImg" idx="0"/>
+          </p:nvPr>
+        </p:nvSpPr>
+        <p:spPr/>
+      </p:sp>
+      <p:sp>
+        <p:nvSpPr>
+          <p:cNvPr id="3" name="Notes Placeholder 2"/>
+          <p:cNvSpPr>
+            <a:spLocks xmlns:a="http://schemas.openxmlformats.org/drawingml/2006/main" noGrp="1"/>
+          </p:cNvSpPr>
+          <p:nvPr>
+            <p:ph type="body" idx="1"/>
+          </p:nvPr>
+        </p:nvSpPr>
+        <p:spPr/>
+        <p:txBody>
+          <a:bodyPr xmlns:a="http://schemas.openxmlformats.org/drawingml/2006/main"/>
+          <a:lstStyle xmlns:a="http://schemas.openxmlformats.org/drawingml/2006/main"/>
+          <a:p xmlns:a="http://schemas.openxmlformats.org/drawingml/2006/main">
+            <a:r>
               <a:t>Use the final tutorial checklist. Ask students to explain the module concept without reading code. Source: Module 5 Word tutorial.</a:t>
+            </a:r>
+          </a:p>
+        </p:txBody>
+      </p:sp>
+      <p:sp>
+        <p:nvSpPr>
+          <p:cNvPr id="4" name="Slide Number Placeholder 3"/>
+          <p:cNvSpPr>
+            <a:spLocks xmlns:a="http://schemas.openxmlformats.org/drawingml/2006/main" noGrp="1"/>
+          </p:cNvSpPr>
+          <p:nvPr>
+            <p:ph type="sldNum" idx="5"/>
+          </p:nvPr>
+        </p:nvSpPr>
+        <p:spPr/>
+        <p:txBody>
+          <a:bodyPr xmlns:a="http://schemas.openxmlformats.org/drawingml/2006/main"/>
+          <a:lstStyle xmlns:a="http://schemas.openxmlformats.org/drawingml/2006/main"/>
+          <a:p xmlns:a="http://schemas.openxmlformats.org/drawingml/2006/main"/>
+        </p:txBody>
+      </p:sp>
+    </p:spTree>
+  </p:cSld>
+  <p:clrMapOvr>
+    <a:masterClrMapping xmlns:a="http://schemas.openxmlformats.org/drawingml/2006/main"/>
+  </p:clrMapOvr>
+</p:notes>
+</file>
+
+<file path=ppt/notesSlides/notesSlide14.xml><?xml version="1.0" encoding="utf-8"?>
+<p:notes xmlns:p="http://schemas.openxmlformats.org/presentationml/2006/main">
+  <p:cSld>
+    <p:spTree>
+      <p:nvGrpSpPr>
+        <p:cNvPr id="1" name=""/>
+        <p:cNvGrpSpPr/>
+        <p:nvPr/>
+      </p:nvGrpSpPr>
+      <p:grpSpPr>
+        <a:xfrm xmlns:a="http://schemas.openxmlformats.org/drawingml/2006/main"/>
+      </p:grpSpPr>
+      <p:sp>
+        <p:nvSpPr>
+          <p:cNvPr id="2" name="Slide Image Placeholder 1"/>
+          <p:cNvSpPr>
+            <a:spLocks xmlns:a="http://schemas.openxmlformats.org/drawingml/2006/main" noGrp="1"/>
+          </p:cNvSpPr>
+          <p:nvPr>
+            <p:ph type="sldImg" idx="0"/>
+          </p:nvPr>
+        </p:nvSpPr>
+        <p:spPr/>
+      </p:sp>
+      <p:sp>
+        <p:nvSpPr>
+          <p:cNvPr id="3" name="Notes Placeholder 2"/>
+          <p:cNvSpPr>
+            <a:spLocks xmlns:a="http://schemas.openxmlformats.org/drawingml/2006/main" noGrp="1"/>
+          </p:cNvSpPr>
+          <p:nvPr>
+            <p:ph type="body" idx="1"/>
+          </p:nvPr>
+        </p:nvSpPr>
+        <p:spPr/>
+        <p:txBody>
+          <a:bodyPr xmlns:a="http://schemas.openxmlformats.org/drawingml/2006/main"/>
+          <a:lstStyle xmlns:a="http://schemas.openxmlformats.org/drawingml/2006/main"/>
+          <a:p xmlns:a="http://schemas.openxmlformats.org/drawingml/2006/main">
+            <a:r>
+              <a:t>Student reading: Binding context and CollectionView. https://learn.microsoft.com/dotnet/maui/fundamentals/data-binding/basic-bindings</a:t>
             </a:r>
           </a:p>
         </p:txBody>
@@ -789,7 +1002,7 @@
           <a:lstStyle xmlns:a="http://schemas.openxmlformats.org/drawingml/2006/main"/>
           <a:p xmlns:a="http://schemas.openxmlformats.org/drawingml/2006/main">
             <a:r>
-              <a:t>Explain the work for Module 5. Show the expected app result before students start. Source: Module 5 Word tutorial.</a:t>
+              <a:t>Give students the outcome before they start. Source: Module 5 Word tutorial.</a:t>
             </a:r>
           </a:p>
         </p:txBody>
@@ -859,7 +1072,7 @@
           <a:lstStyle xmlns:a="http://schemas.openxmlformats.org/drawingml/2006/main"/>
           <a:p xmlns:a="http://schemas.openxmlformats.org/drawingml/2006/main">
             <a:r>
-              <a:t>Before tutorial Step 1: explain these concepts. Ask students to predict what the change will do. Then open Step 1 in the Word tutorial. Source: Module 5 Word tutorial.</a:t>
+              <a:t>Explain the framework idea before the first exercise step. MAUI documentation: https://learn.microsoft.com/dotnet/maui/fundamentals/data-binding/basic-bindings</a:t>
             </a:r>
           </a:p>
         </p:txBody>
@@ -929,7 +1142,7 @@
           <a:lstStyle xmlns:a="http://schemas.openxmlformats.org/drawingml/2006/main"/>
           <a:p xmlns:a="http://schemas.openxmlformats.org/drawingml/2006/main">
             <a:r>
-              <a:t>After tutorial Step 1: run the app or inspect the code. Ask students to explain the observed result. Source: Module 5 Word tutorial.</a:t>
+              <a:t>Ask students to identify the C# object, the XAML control, and the connection between them. Source: Module 5 Word tutorial. MAUI documentation: https://learn.microsoft.com/dotnet/maui/fundamentals/data-binding/basic-bindings</a:t>
             </a:r>
           </a:p>
         </p:txBody>
@@ -999,7 +1212,7 @@
           <a:lstStyle xmlns:a="http://schemas.openxmlformats.org/drawingml/2006/main"/>
           <a:p xmlns:a="http://schemas.openxmlformats.org/drawingml/2006/main">
             <a:r>
-              <a:t>Before tutorial Step 2: explain these concepts. Ask students to predict what the change will do. Then open Step 2 in the Word tutorial. Source: Module 5 Word tutorial.</a:t>
+              <a:t>Before tutorial Step 1: explain these concepts. Ask students to predict what the change will do. Then open Step 1 in the Word tutorial. Source: Module 5 Word tutorial. Related MAUI documentation: https://learn.microsoft.com/dotnet/maui/fundamentals/data-binding/basic-bindings</a:t>
             </a:r>
           </a:p>
         </p:txBody>
@@ -1069,7 +1282,7 @@
           <a:lstStyle xmlns:a="http://schemas.openxmlformats.org/drawingml/2006/main"/>
           <a:p xmlns:a="http://schemas.openxmlformats.org/drawingml/2006/main">
             <a:r>
-              <a:t>After tutorial Step 2: run the app or inspect the code. Ask students to explain the observed result. Source: Module 5 Word tutorial.</a:t>
+              <a:t>After tutorial Step 1: run the app or inspect the code. Ask students to explain the observed result. Source: Module 5 Word tutorial.</a:t>
             </a:r>
           </a:p>
         </p:txBody>
@@ -1139,7 +1352,7 @@
           <a:lstStyle xmlns:a="http://schemas.openxmlformats.org/drawingml/2006/main"/>
           <a:p xmlns:a="http://schemas.openxmlformats.org/drawingml/2006/main">
             <a:r>
-              <a:t>Before tutorial Step 4: explain these concepts. Ask students to predict what the change will do. Then open Step 4 in the Word tutorial. Source: Module 5 Word tutorial.</a:t>
+              <a:t>Before tutorial Step 2: explain these concepts. Ask students to predict what the change will do. Then open Step 2 in the Word tutorial. Source: Module 5 Word tutorial. Related MAUI documentation: https://learn.microsoft.com/dotnet/maui/fundamentals/data-binding/basic-bindings</a:t>
             </a:r>
           </a:p>
         </p:txBody>
@@ -1209,7 +1422,7 @@
           <a:lstStyle xmlns:a="http://schemas.openxmlformats.org/drawingml/2006/main"/>
           <a:p xmlns:a="http://schemas.openxmlformats.org/drawingml/2006/main">
             <a:r>
-              <a:t>After tutorial Step 4: run the app or inspect the code. Ask students to explain the observed result. Source: Module 5 Word tutorial.</a:t>
+              <a:t>After tutorial Step 2: run the app or inspect the code. Ask students to explain the observed result. Source: Module 5 Word tutorial.</a:t>
             </a:r>
           </a:p>
         </p:txBody>
@@ -1279,7 +1492,7 @@
           <a:lstStyle xmlns:a="http://schemas.openxmlformats.org/drawingml/2006/main"/>
           <a:p xmlns:a="http://schemas.openxmlformats.org/drawingml/2006/main">
             <a:r>
-              <a:t>Before tutorial Step 5: explain these concepts. Ask students to predict what the change will do. Then open Step 5 in the Word tutorial. Source: Module 5 Word tutorial.</a:t>
+              <a:t>Before tutorial Step 4: explain these concepts. Ask students to predict what the change will do. Then open Step 4 in the Word tutorial. Source: Module 5 Word tutorial. Related MAUI documentation: https://learn.microsoft.com/dotnet/maui/fundamentals/data-binding/basic-bindings</a:t>
             </a:r>
           </a:p>
         </p:txBody>
@@ -1389,7 +1602,7 @@
           <p:cNvPr id="14" name="Picture 13">
             <a:extLst xmlns:a="http://schemas.openxmlformats.org/drawingml/2006/main">
               <a:ext uri="{FF2B5EF4-FFF2-40B4-BE49-F238E27FC236}">
-                <a16:creationId xmlns:a16="http://schemas.microsoft.com/office/drawing/2014/main" id="{7700AEB8-6410-4F52-B44F-528032D9CE46}"/>
+                <a16:creationId xmlns:a16="http://schemas.microsoft.com/office/drawing/2014/main" id="{B3B7CCFA-48AA-484A-B77D-1F9E71BF252F}"/>
               </a:ext>
             </a:extLst>
           </p:cNvPr>
@@ -1399,7 +1612,7 @@
           <p:nvPr/>
         </p:nvPicPr>
         <p:blipFill>
-          <a:blip xmlns:r="http://schemas.openxmlformats.org/officeDocument/2006/relationships" xmlns:a="http://schemas.openxmlformats.org/drawingml/2006/main" r:embed="Rc974c72b0d2c4e43">
+          <a:blip xmlns:r="http://schemas.openxmlformats.org/officeDocument/2006/relationships" xmlns:a="http://schemas.openxmlformats.org/drawingml/2006/main" r:embed="R63cf1dca69d74753">
             <a:alphaModFix amt="40000"/>
           </a:blip>
           <a:stretch xmlns:a="http://schemas.openxmlformats.org/drawingml/2006/main">
@@ -1562,7 +1775,7 @@
           <p:cNvPr id="2" name="Title 1">
             <a:extLst xmlns:a="http://schemas.openxmlformats.org/drawingml/2006/main">
               <a:ext uri="{FF2B5EF4-FFF2-40B4-BE49-F238E27FC236}">
-                <a16:creationId xmlns:a16="http://schemas.microsoft.com/office/drawing/2014/main" id="{2C1CB261-2291-4BDC-81DF-D1CD1EBD9338}"/>
+                <a16:creationId xmlns:a16="http://schemas.microsoft.com/office/drawing/2014/main" id="{52EF50C0-642D-4AAD-91FD-480C0DDACEA0}"/>
               </a:ext>
             </a:extLst>
           </p:cNvPr>
@@ -1609,7 +1822,7 @@
           <p:cNvPr id="3" name="Subtitle 2">
             <a:extLst xmlns:a="http://schemas.openxmlformats.org/drawingml/2006/main">
               <a:ext uri="{FF2B5EF4-FFF2-40B4-BE49-F238E27FC236}">
-                <a16:creationId xmlns:a16="http://schemas.microsoft.com/office/drawing/2014/main" id="{5C28620B-B0CF-43EF-9615-6AC63887609C}"/>
+                <a16:creationId xmlns:a16="http://schemas.microsoft.com/office/drawing/2014/main" id="{DE263A84-D5BA-493D-BA48-3EC7E3351816}"/>
               </a:ext>
             </a:extLst>
           </p:cNvPr>
@@ -1737,7 +1950,7 @@
           <p:cNvPr id="4" name="Date Placeholder 3">
             <a:extLst xmlns:a="http://schemas.openxmlformats.org/drawingml/2006/main">
               <a:ext uri="{FF2B5EF4-FFF2-40B4-BE49-F238E27FC236}">
-                <a16:creationId xmlns:a16="http://schemas.microsoft.com/office/drawing/2014/main" id="{C2AE8796-866F-4126-BCD8-3B69B22716F6}"/>
+                <a16:creationId xmlns:a16="http://schemas.microsoft.com/office/drawing/2014/main" id="{019C9CE5-75E3-4290-A0F5-301D8BE32B31}"/>
               </a:ext>
             </a:extLst>
           </p:cNvPr>
@@ -1765,7 +1978,7 @@
           <p:cNvPr id="5" name="Footer Placeholder 4">
             <a:extLst xmlns:a="http://schemas.openxmlformats.org/drawingml/2006/main">
               <a:ext uri="{FF2B5EF4-FFF2-40B4-BE49-F238E27FC236}">
-                <a16:creationId xmlns:a16="http://schemas.microsoft.com/office/drawing/2014/main" id="{3B39E360-EC00-4F6F-B1E3-6911E6E63B67}"/>
+                <a16:creationId xmlns:a16="http://schemas.microsoft.com/office/drawing/2014/main" id="{7B724142-E982-4E7C-97B5-873491CB8DE8}"/>
               </a:ext>
             </a:extLst>
           </p:cNvPr>
@@ -1790,7 +2003,7 @@
           <p:cNvPr id="6" name="Slide Number Placeholder 5">
             <a:extLst xmlns:a="http://schemas.openxmlformats.org/drawingml/2006/main">
               <a:ext uri="{FF2B5EF4-FFF2-40B4-BE49-F238E27FC236}">
-                <a16:creationId xmlns:a16="http://schemas.microsoft.com/office/drawing/2014/main" id="{CF7114E1-5B1D-4280-A97C-EBEBBE8C42BD}"/>
+                <a16:creationId xmlns:a16="http://schemas.microsoft.com/office/drawing/2014/main" id="{A3E8D84B-6983-42D1-B31D-721A870EBE49}"/>
               </a:ext>
             </a:extLst>
           </p:cNvPr>
@@ -1889,7 +2102,7 @@
           <p:cNvPr id="2" name="Title 1">
             <a:extLst xmlns:a="http://schemas.openxmlformats.org/drawingml/2006/main">
               <a:ext uri="{FF2B5EF4-FFF2-40B4-BE49-F238E27FC236}">
-                <a16:creationId xmlns:a16="http://schemas.microsoft.com/office/drawing/2014/main" id="{3236E0AB-680B-426B-9AB2-BC1429D4ED1B}"/>
+                <a16:creationId xmlns:a16="http://schemas.microsoft.com/office/drawing/2014/main" id="{5CB188DA-0AE8-4D3B-B021-5470B46A1E3B}"/>
               </a:ext>
             </a:extLst>
           </p:cNvPr>
@@ -1916,7 +2129,7 @@
           <p:cNvPr id="3" name="Vertical Text Placeholder 2">
             <a:extLst xmlns:a="http://schemas.openxmlformats.org/drawingml/2006/main">
               <a:ext uri="{FF2B5EF4-FFF2-40B4-BE49-F238E27FC236}">
-                <a16:creationId xmlns:a16="http://schemas.microsoft.com/office/drawing/2014/main" id="{8DF5A064-D2E7-4577-97EE-F77F2236BF5E}"/>
+                <a16:creationId xmlns:a16="http://schemas.microsoft.com/office/drawing/2014/main" id="{08F02AE6-B16F-421A-87BD-435383BC9B21}"/>
               </a:ext>
             </a:extLst>
           </p:cNvPr>
@@ -1978,7 +2191,7 @@
           <p:cNvPr id="4" name="Date Placeholder 3">
             <a:extLst xmlns:a="http://schemas.openxmlformats.org/drawingml/2006/main">
               <a:ext uri="{FF2B5EF4-FFF2-40B4-BE49-F238E27FC236}">
-                <a16:creationId xmlns:a16="http://schemas.microsoft.com/office/drawing/2014/main" id="{A1A45051-F172-4580-93BD-447353D0990A}"/>
+                <a16:creationId xmlns:a16="http://schemas.microsoft.com/office/drawing/2014/main" id="{07361794-6358-4F21-9E44-BD399E7E4EFC}"/>
               </a:ext>
             </a:extLst>
           </p:cNvPr>
@@ -2006,7 +2219,7 @@
           <p:cNvPr id="5" name="Footer Placeholder 4">
             <a:extLst xmlns:a="http://schemas.openxmlformats.org/drawingml/2006/main">
               <a:ext uri="{FF2B5EF4-FFF2-40B4-BE49-F238E27FC236}">
-                <a16:creationId xmlns:a16="http://schemas.microsoft.com/office/drawing/2014/main" id="{663755B3-3FB6-459F-A86D-B72F21707363}"/>
+                <a16:creationId xmlns:a16="http://schemas.microsoft.com/office/drawing/2014/main" id="{8F7CEABF-6457-4C05-A3A4-4213AE5BA4B7}"/>
               </a:ext>
             </a:extLst>
           </p:cNvPr>
@@ -2031,7 +2244,7 @@
           <p:cNvPr id="6" name="Slide Number Placeholder 5">
             <a:extLst xmlns:a="http://schemas.openxmlformats.org/drawingml/2006/main">
               <a:ext uri="{FF2B5EF4-FFF2-40B4-BE49-F238E27FC236}">
-                <a16:creationId xmlns:a16="http://schemas.microsoft.com/office/drawing/2014/main" id="{94C72C4F-E543-4D6A-9093-140C4269B873}"/>
+                <a16:creationId xmlns:a16="http://schemas.microsoft.com/office/drawing/2014/main" id="{2E14AB10-7C2D-423F-B969-C2B68FFE0690}"/>
               </a:ext>
             </a:extLst>
           </p:cNvPr>
@@ -2076,7 +2289,7 @@
           <p:cNvPr id="2" name="Vertical Title 1">
             <a:extLst xmlns:a="http://schemas.openxmlformats.org/drawingml/2006/main">
               <a:ext uri="{FF2B5EF4-FFF2-40B4-BE49-F238E27FC236}">
-                <a16:creationId xmlns:a16="http://schemas.microsoft.com/office/drawing/2014/main" id="{827FB11C-9488-4C6C-85FF-6F2084160084}"/>
+                <a16:creationId xmlns:a16="http://schemas.microsoft.com/office/drawing/2014/main" id="{095CF6C6-95F2-47D2-92A1-F13B39D80175}"/>
               </a:ext>
             </a:extLst>
           </p:cNvPr>
@@ -2108,7 +2321,7 @@
           <p:cNvPr id="3" name="Vertical Text Placeholder 2">
             <a:extLst xmlns:a="http://schemas.openxmlformats.org/drawingml/2006/main">
               <a:ext uri="{FF2B5EF4-FFF2-40B4-BE49-F238E27FC236}">
-                <a16:creationId xmlns:a16="http://schemas.microsoft.com/office/drawing/2014/main" id="{DB90CA9B-4551-4FE3-BC58-280980F45E5F}"/>
+                <a16:creationId xmlns:a16="http://schemas.microsoft.com/office/drawing/2014/main" id="{536F8037-FCB0-44FB-A1F5-0DC5869AEF2C}"/>
               </a:ext>
             </a:extLst>
           </p:cNvPr>
@@ -2175,7 +2388,7 @@
           <p:cNvPr id="4" name="Date Placeholder 3">
             <a:extLst xmlns:a="http://schemas.openxmlformats.org/drawingml/2006/main">
               <a:ext uri="{FF2B5EF4-FFF2-40B4-BE49-F238E27FC236}">
-                <a16:creationId xmlns:a16="http://schemas.microsoft.com/office/drawing/2014/main" id="{DF7B17E7-FDC5-41EF-95BE-CACEEE4987A4}"/>
+                <a16:creationId xmlns:a16="http://schemas.microsoft.com/office/drawing/2014/main" id="{2BD2D6CB-2E78-4846-9A63-42D6CA330B23}"/>
               </a:ext>
             </a:extLst>
           </p:cNvPr>
@@ -2203,7 +2416,7 @@
           <p:cNvPr id="5" name="Footer Placeholder 4">
             <a:extLst xmlns:a="http://schemas.openxmlformats.org/drawingml/2006/main">
               <a:ext uri="{FF2B5EF4-FFF2-40B4-BE49-F238E27FC236}">
-                <a16:creationId xmlns:a16="http://schemas.microsoft.com/office/drawing/2014/main" id="{A54FC9D6-255E-4EA2-8535-7472A82E55BE}"/>
+                <a16:creationId xmlns:a16="http://schemas.microsoft.com/office/drawing/2014/main" id="{E14C9FF6-3E89-426A-AA8A-73A3DAFFFF1B}"/>
               </a:ext>
             </a:extLst>
           </p:cNvPr>
@@ -2228,7 +2441,7 @@
           <p:cNvPr id="6" name="Slide Number Placeholder 5">
             <a:extLst xmlns:a="http://schemas.openxmlformats.org/drawingml/2006/main">
               <a:ext uri="{FF2B5EF4-FFF2-40B4-BE49-F238E27FC236}">
-                <a16:creationId xmlns:a16="http://schemas.microsoft.com/office/drawing/2014/main" id="{6F7B2903-FA99-4C21-8486-1F46CA038986}"/>
+                <a16:creationId xmlns:a16="http://schemas.microsoft.com/office/drawing/2014/main" id="{04D92C74-2A35-41EC-BEC6-646A610D9BBD}"/>
               </a:ext>
             </a:extLst>
           </p:cNvPr>
@@ -2273,7 +2486,7 @@
           <p:cNvPr id="3" name="Content Placeholder 2">
             <a:extLst xmlns:a="http://schemas.openxmlformats.org/drawingml/2006/main">
               <a:ext uri="{FF2B5EF4-FFF2-40B4-BE49-F238E27FC236}">
-                <a16:creationId xmlns:a16="http://schemas.microsoft.com/office/drawing/2014/main" id="{BD3AD6A2-01E0-4D2B-8055-F4378782B593}"/>
+                <a16:creationId xmlns:a16="http://schemas.microsoft.com/office/drawing/2014/main" id="{821D3FE4-0D83-46DD-A40C-9ACF503108E5}"/>
               </a:ext>
             </a:extLst>
           </p:cNvPr>
@@ -2336,7 +2549,7 @@
           <p:cNvPr id="4" name="Date Placeholder 3">
             <a:extLst xmlns:a="http://schemas.openxmlformats.org/drawingml/2006/main">
               <a:ext uri="{FF2B5EF4-FFF2-40B4-BE49-F238E27FC236}">
-                <a16:creationId xmlns:a16="http://schemas.microsoft.com/office/drawing/2014/main" id="{2CF3D129-6CBF-44C8-8B96-24D4B7E08D14}"/>
+                <a16:creationId xmlns:a16="http://schemas.microsoft.com/office/drawing/2014/main" id="{3E730824-9CF8-4D09-B06F-6BF7CD6C6694}"/>
               </a:ext>
             </a:extLst>
           </p:cNvPr>
@@ -2364,7 +2577,7 @@
           <p:cNvPr id="5" name="Footer Placeholder 4">
             <a:extLst xmlns:a="http://schemas.openxmlformats.org/drawingml/2006/main">
               <a:ext uri="{FF2B5EF4-FFF2-40B4-BE49-F238E27FC236}">
-                <a16:creationId xmlns:a16="http://schemas.microsoft.com/office/drawing/2014/main" id="{42632EAB-CFB5-4B03-AA93-EC51131E1B17}"/>
+                <a16:creationId xmlns:a16="http://schemas.microsoft.com/office/drawing/2014/main" id="{DB51D7E6-CD04-4CCB-BC26-9325ADFF4DF1}"/>
               </a:ext>
             </a:extLst>
           </p:cNvPr>
@@ -2389,7 +2602,7 @@
           <p:cNvPr id="6" name="Slide Number Placeholder 5">
             <a:extLst xmlns:a="http://schemas.openxmlformats.org/drawingml/2006/main">
               <a:ext uri="{FF2B5EF4-FFF2-40B4-BE49-F238E27FC236}">
-                <a16:creationId xmlns:a16="http://schemas.microsoft.com/office/drawing/2014/main" id="{20D38617-9F5D-4C5C-BBE5-7F1290A29381}"/>
+                <a16:creationId xmlns:a16="http://schemas.microsoft.com/office/drawing/2014/main" id="{909056FF-C560-4D9C-9C24-432197922B76}"/>
               </a:ext>
             </a:extLst>
           </p:cNvPr>
@@ -2477,7 +2690,7 @@
           <p:cNvPr id="2" name="Title 1">
             <a:extLst xmlns:a="http://schemas.openxmlformats.org/drawingml/2006/main">
               <a:ext uri="{FF2B5EF4-FFF2-40B4-BE49-F238E27FC236}">
-                <a16:creationId xmlns:a16="http://schemas.microsoft.com/office/drawing/2014/main" id="{00FA909B-95CB-4B85-9F30-4DB29DCAF35B}"/>
+                <a16:creationId xmlns:a16="http://schemas.microsoft.com/office/drawing/2014/main" id="{8BCE9BAD-B408-45DD-A3B1-E9397837FDFC}"/>
               </a:ext>
             </a:extLst>
           </p:cNvPr>
@@ -2515,7 +2728,7 @@
           <p:cNvPr id="3" name="Text Placeholder 2">
             <a:extLst xmlns:a="http://schemas.openxmlformats.org/drawingml/2006/main">
               <a:ext uri="{FF2B5EF4-FFF2-40B4-BE49-F238E27FC236}">
-                <a16:creationId xmlns:a16="http://schemas.microsoft.com/office/drawing/2014/main" id="{2C7849BB-4D50-4774-ABE3-90D360F1B7AD}"/>
+                <a16:creationId xmlns:a16="http://schemas.microsoft.com/office/drawing/2014/main" id="{8E57D997-4D67-4C20-9767-0C4EE4C31579}"/>
               </a:ext>
             </a:extLst>
           </p:cNvPr>
@@ -2641,7 +2854,7 @@
           <p:cNvPr id="4" name="Date Placeholder 3">
             <a:extLst xmlns:a="http://schemas.openxmlformats.org/drawingml/2006/main">
               <a:ext uri="{FF2B5EF4-FFF2-40B4-BE49-F238E27FC236}">
-                <a16:creationId xmlns:a16="http://schemas.microsoft.com/office/drawing/2014/main" id="{55A48581-4593-4C07-ADD8-A09CCCCA5CC9}"/>
+                <a16:creationId xmlns:a16="http://schemas.microsoft.com/office/drawing/2014/main" id="{E26AD136-EB45-4E3B-8908-7D2EF5F866C1}"/>
               </a:ext>
             </a:extLst>
           </p:cNvPr>
@@ -2669,7 +2882,7 @@
           <p:cNvPr id="5" name="Footer Placeholder 4">
             <a:extLst xmlns:a="http://schemas.openxmlformats.org/drawingml/2006/main">
               <a:ext uri="{FF2B5EF4-FFF2-40B4-BE49-F238E27FC236}">
-                <a16:creationId xmlns:a16="http://schemas.microsoft.com/office/drawing/2014/main" id="{DA1FCCE7-CA72-4A11-B5CE-1E965407ABDA}"/>
+                <a16:creationId xmlns:a16="http://schemas.microsoft.com/office/drawing/2014/main" id="{8E9BF3E4-2595-417A-BDAA-FE365041D563}"/>
               </a:ext>
             </a:extLst>
           </p:cNvPr>
@@ -2694,7 +2907,7 @@
           <p:cNvPr id="6" name="Slide Number Placeholder 5">
             <a:extLst xmlns:a="http://schemas.openxmlformats.org/drawingml/2006/main">
               <a:ext uri="{FF2B5EF4-FFF2-40B4-BE49-F238E27FC236}">
-                <a16:creationId xmlns:a16="http://schemas.microsoft.com/office/drawing/2014/main" id="{1EEB0E7B-B5BD-4404-9169-964D224B15E1}"/>
+                <a16:creationId xmlns:a16="http://schemas.microsoft.com/office/drawing/2014/main" id="{6E8D5A81-B49C-4300-BB1F-E13686A770AF}"/>
               </a:ext>
             </a:extLst>
           </p:cNvPr>
@@ -2739,7 +2952,7 @@
           <p:cNvPr id="2" name="Title 1">
             <a:extLst xmlns:a="http://schemas.openxmlformats.org/drawingml/2006/main">
               <a:ext uri="{FF2B5EF4-FFF2-40B4-BE49-F238E27FC236}">
-                <a16:creationId xmlns:a16="http://schemas.microsoft.com/office/drawing/2014/main" id="{7C46F161-D771-478D-8F5B-20C0298627E3}"/>
+                <a16:creationId xmlns:a16="http://schemas.microsoft.com/office/drawing/2014/main" id="{0F1B4709-FCDE-47A1-9183-4B9D84723A63}"/>
               </a:ext>
             </a:extLst>
           </p:cNvPr>
@@ -2766,7 +2979,7 @@
           <p:cNvPr id="3" name="Content Placeholder 2">
             <a:extLst xmlns:a="http://schemas.openxmlformats.org/drawingml/2006/main">
               <a:ext uri="{FF2B5EF4-FFF2-40B4-BE49-F238E27FC236}">
-                <a16:creationId xmlns:a16="http://schemas.microsoft.com/office/drawing/2014/main" id="{D401DF88-B096-425C-B56D-575EEDB0720F}"/>
+                <a16:creationId xmlns:a16="http://schemas.microsoft.com/office/drawing/2014/main" id="{FFE3AD1D-D844-4EEA-B459-DB09DF4E7B3B}"/>
               </a:ext>
             </a:extLst>
           </p:cNvPr>
@@ -2871,7 +3084,7 @@
           <p:cNvPr id="4" name="Content Placeholder 3">
             <a:extLst xmlns:a="http://schemas.openxmlformats.org/drawingml/2006/main">
               <a:ext uri="{FF2B5EF4-FFF2-40B4-BE49-F238E27FC236}">
-                <a16:creationId xmlns:a16="http://schemas.microsoft.com/office/drawing/2014/main" id="{8CE5511D-CBC1-4A66-80D1-2B72D14219D1}"/>
+                <a16:creationId xmlns:a16="http://schemas.microsoft.com/office/drawing/2014/main" id="{1E99A293-6F8A-4CF0-B5B9-149E94312AB2}"/>
               </a:ext>
             </a:extLst>
           </p:cNvPr>
@@ -2976,7 +3189,7 @@
           <p:cNvPr id="5" name="Date Placeholder 4">
             <a:extLst xmlns:a="http://schemas.openxmlformats.org/drawingml/2006/main">
               <a:ext uri="{FF2B5EF4-FFF2-40B4-BE49-F238E27FC236}">
-                <a16:creationId xmlns:a16="http://schemas.microsoft.com/office/drawing/2014/main" id="{E6725DDE-1C2A-4D7E-BA81-FC68D77058E0}"/>
+                <a16:creationId xmlns:a16="http://schemas.microsoft.com/office/drawing/2014/main" id="{4E1F0292-8612-45A2-8164-13E00856C147}"/>
               </a:ext>
             </a:extLst>
           </p:cNvPr>
@@ -3004,7 +3217,7 @@
           <p:cNvPr id="6" name="Footer Placeholder 5">
             <a:extLst xmlns:a="http://schemas.openxmlformats.org/drawingml/2006/main">
               <a:ext uri="{FF2B5EF4-FFF2-40B4-BE49-F238E27FC236}">
-                <a16:creationId xmlns:a16="http://schemas.microsoft.com/office/drawing/2014/main" id="{84003786-119E-488F-B6F3-93835E597753}"/>
+                <a16:creationId xmlns:a16="http://schemas.microsoft.com/office/drawing/2014/main" id="{93002E86-B826-4059-A344-C2C20ED591DD}"/>
               </a:ext>
             </a:extLst>
           </p:cNvPr>
@@ -3029,7 +3242,7 @@
           <p:cNvPr id="7" name="Slide Number Placeholder 6">
             <a:extLst xmlns:a="http://schemas.openxmlformats.org/drawingml/2006/main">
               <a:ext uri="{FF2B5EF4-FFF2-40B4-BE49-F238E27FC236}">
-                <a16:creationId xmlns:a16="http://schemas.microsoft.com/office/drawing/2014/main" id="{BAD79618-B21B-4133-9CBD-BA781F28C2D9}"/>
+                <a16:creationId xmlns:a16="http://schemas.microsoft.com/office/drawing/2014/main" id="{DADEF595-D19C-4BB1-B09D-19F295EBF6B2}"/>
               </a:ext>
             </a:extLst>
           </p:cNvPr>
@@ -3074,7 +3287,7 @@
           <p:cNvPr id="2" name="Title 1">
             <a:extLst xmlns:a="http://schemas.openxmlformats.org/drawingml/2006/main">
               <a:ext uri="{FF2B5EF4-FFF2-40B4-BE49-F238E27FC236}">
-                <a16:creationId xmlns:a16="http://schemas.microsoft.com/office/drawing/2014/main" id="{25B02B8C-55AA-4EC6-885B-09F2825E55AD}"/>
+                <a16:creationId xmlns:a16="http://schemas.microsoft.com/office/drawing/2014/main" id="{195710B4-6932-42CC-A1B0-1CA337E32507}"/>
               </a:ext>
             </a:extLst>
           </p:cNvPr>
@@ -3106,7 +3319,7 @@
           <p:cNvPr id="3" name="Text Placeholder 2">
             <a:extLst xmlns:a="http://schemas.openxmlformats.org/drawingml/2006/main">
               <a:ext uri="{FF2B5EF4-FFF2-40B4-BE49-F238E27FC236}">
-                <a16:creationId xmlns:a16="http://schemas.microsoft.com/office/drawing/2014/main" id="{F39E114D-7154-45FE-B5E0-58A70DDABE15}"/>
+                <a16:creationId xmlns:a16="http://schemas.microsoft.com/office/drawing/2014/main" id="{F6C40251-F770-4E00-AA2A-44AB8D4E3336}"/>
               </a:ext>
             </a:extLst>
           </p:cNvPr>
@@ -3178,7 +3391,7 @@
           <p:cNvPr id="4" name="Content Placeholder 3">
             <a:extLst xmlns:a="http://schemas.openxmlformats.org/drawingml/2006/main">
               <a:ext uri="{FF2B5EF4-FFF2-40B4-BE49-F238E27FC236}">
-                <a16:creationId xmlns:a16="http://schemas.microsoft.com/office/drawing/2014/main" id="{2184A191-34DC-4CFD-81DD-4F7DEB4C67D6}"/>
+                <a16:creationId xmlns:a16="http://schemas.microsoft.com/office/drawing/2014/main" id="{B8EC855D-5B05-49E9-A419-1E20CA026FD3}"/>
               </a:ext>
             </a:extLst>
           </p:cNvPr>
@@ -3282,7 +3495,7 @@
           <p:cNvPr id="5" name="Text Placeholder 4">
             <a:extLst xmlns:a="http://schemas.openxmlformats.org/drawingml/2006/main">
               <a:ext uri="{FF2B5EF4-FFF2-40B4-BE49-F238E27FC236}">
-                <a16:creationId xmlns:a16="http://schemas.microsoft.com/office/drawing/2014/main" id="{BD99D6EC-5FFC-47D0-B987-929E49DFF5CA}"/>
+                <a16:creationId xmlns:a16="http://schemas.microsoft.com/office/drawing/2014/main" id="{33CC70DB-CCE0-422A-AEB0-0092A1B2DD6B}"/>
               </a:ext>
             </a:extLst>
           </p:cNvPr>
@@ -3354,7 +3567,7 @@
           <p:cNvPr id="6" name="Content Placeholder 5">
             <a:extLst xmlns:a="http://schemas.openxmlformats.org/drawingml/2006/main">
               <a:ext uri="{FF2B5EF4-FFF2-40B4-BE49-F238E27FC236}">
-                <a16:creationId xmlns:a16="http://schemas.microsoft.com/office/drawing/2014/main" id="{B290697B-7982-416D-B09D-FA58EB240F2B}"/>
+                <a16:creationId xmlns:a16="http://schemas.microsoft.com/office/drawing/2014/main" id="{86080896-7E11-4AEA-956A-69196DD35E7E}"/>
               </a:ext>
             </a:extLst>
           </p:cNvPr>
@@ -3458,7 +3671,7 @@
           <p:cNvPr id="7" name="Date Placeholder 6">
             <a:extLst xmlns:a="http://schemas.openxmlformats.org/drawingml/2006/main">
               <a:ext uri="{FF2B5EF4-FFF2-40B4-BE49-F238E27FC236}">
-                <a16:creationId xmlns:a16="http://schemas.microsoft.com/office/drawing/2014/main" id="{2DEC7263-4029-4078-8946-24691D6C393E}"/>
+                <a16:creationId xmlns:a16="http://schemas.microsoft.com/office/drawing/2014/main" id="{97B6FDA1-8377-415C-88E6-49E72B1D27D2}"/>
               </a:ext>
             </a:extLst>
           </p:cNvPr>
@@ -3486,7 +3699,7 @@
           <p:cNvPr id="8" name="Footer Placeholder 7">
             <a:extLst xmlns:a="http://schemas.openxmlformats.org/drawingml/2006/main">
               <a:ext uri="{FF2B5EF4-FFF2-40B4-BE49-F238E27FC236}">
-                <a16:creationId xmlns:a16="http://schemas.microsoft.com/office/drawing/2014/main" id="{DC37F249-7F75-44B4-826F-C4D4E3460A00}"/>
+                <a16:creationId xmlns:a16="http://schemas.microsoft.com/office/drawing/2014/main" id="{012CFE74-BE86-484C-ACDB-F2CFD633FFE9}"/>
               </a:ext>
             </a:extLst>
           </p:cNvPr>
@@ -3511,7 +3724,7 @@
           <p:cNvPr id="9" name="Slide Number Placeholder 8">
             <a:extLst xmlns:a="http://schemas.openxmlformats.org/drawingml/2006/main">
               <a:ext uri="{FF2B5EF4-FFF2-40B4-BE49-F238E27FC236}">
-                <a16:creationId xmlns:a16="http://schemas.microsoft.com/office/drawing/2014/main" id="{DF09B1D2-1C25-4B7D-B661-2133D063455A}"/>
+                <a16:creationId xmlns:a16="http://schemas.microsoft.com/office/drawing/2014/main" id="{DBD069D1-922A-40AD-B18B-3FDCC1CBF9FC}"/>
               </a:ext>
             </a:extLst>
           </p:cNvPr>
@@ -3556,7 +3769,7 @@
           <p:cNvPr id="2" name="Title 1">
             <a:extLst xmlns:a="http://schemas.openxmlformats.org/drawingml/2006/main">
               <a:ext uri="{FF2B5EF4-FFF2-40B4-BE49-F238E27FC236}">
-                <a16:creationId xmlns:a16="http://schemas.microsoft.com/office/drawing/2014/main" id="{0FF93A41-6B66-4C8C-889B-430B4A038B6E}"/>
+                <a16:creationId xmlns:a16="http://schemas.microsoft.com/office/drawing/2014/main" id="{21C1E760-92CD-47EB-9FED-DC54D8492C3A}"/>
               </a:ext>
             </a:extLst>
           </p:cNvPr>
@@ -3583,7 +3796,7 @@
           <p:cNvPr id="3" name="Date Placeholder 2">
             <a:extLst xmlns:a="http://schemas.openxmlformats.org/drawingml/2006/main">
               <a:ext uri="{FF2B5EF4-FFF2-40B4-BE49-F238E27FC236}">
-                <a16:creationId xmlns:a16="http://schemas.microsoft.com/office/drawing/2014/main" id="{25AEBEA8-C774-4916-B08F-7E11DDCB0FE4}"/>
+                <a16:creationId xmlns:a16="http://schemas.microsoft.com/office/drawing/2014/main" id="{B0B3D8F2-F630-459D-8725-EEBB4A2C0B9B}"/>
               </a:ext>
             </a:extLst>
           </p:cNvPr>
@@ -3611,7 +3824,7 @@
           <p:cNvPr id="4" name="Footer Placeholder 3">
             <a:extLst xmlns:a="http://schemas.openxmlformats.org/drawingml/2006/main">
               <a:ext uri="{FF2B5EF4-FFF2-40B4-BE49-F238E27FC236}">
-                <a16:creationId xmlns:a16="http://schemas.microsoft.com/office/drawing/2014/main" id="{0FB8A954-5036-47A4-A5EA-62DAD2C339EC}"/>
+                <a16:creationId xmlns:a16="http://schemas.microsoft.com/office/drawing/2014/main" id="{4D6AB0E1-9A55-4E36-877C-6E19A4AAB6C0}"/>
               </a:ext>
             </a:extLst>
           </p:cNvPr>
@@ -3636,7 +3849,7 @@
           <p:cNvPr id="5" name="Slide Number Placeholder 4">
             <a:extLst xmlns:a="http://schemas.openxmlformats.org/drawingml/2006/main">
               <a:ext uri="{FF2B5EF4-FFF2-40B4-BE49-F238E27FC236}">
-                <a16:creationId xmlns:a16="http://schemas.microsoft.com/office/drawing/2014/main" id="{FA7EF45B-895A-4B38-9DDE-8F7E3224FAE5}"/>
+                <a16:creationId xmlns:a16="http://schemas.microsoft.com/office/drawing/2014/main" id="{99848D48-5803-49B2-9B67-40E12BF16840}"/>
               </a:ext>
             </a:extLst>
           </p:cNvPr>
@@ -3681,7 +3894,7 @@
           <p:cNvPr id="2" name="Date Placeholder 1">
             <a:extLst xmlns:a="http://schemas.openxmlformats.org/drawingml/2006/main">
               <a:ext uri="{FF2B5EF4-FFF2-40B4-BE49-F238E27FC236}">
-                <a16:creationId xmlns:a16="http://schemas.microsoft.com/office/drawing/2014/main" id="{6B93E088-13F7-40D5-9CD1-607034F658BC}"/>
+                <a16:creationId xmlns:a16="http://schemas.microsoft.com/office/drawing/2014/main" id="{A5FE7123-CFED-42DE-91B9-E3C23F3542CC}"/>
               </a:ext>
             </a:extLst>
           </p:cNvPr>
@@ -3709,7 +3922,7 @@
           <p:cNvPr id="3" name="Footer Placeholder 2">
             <a:extLst xmlns:a="http://schemas.openxmlformats.org/drawingml/2006/main">
               <a:ext uri="{FF2B5EF4-FFF2-40B4-BE49-F238E27FC236}">
-                <a16:creationId xmlns:a16="http://schemas.microsoft.com/office/drawing/2014/main" id="{0864457D-B54B-4910-A81D-B749116EF9E6}"/>
+                <a16:creationId xmlns:a16="http://schemas.microsoft.com/office/drawing/2014/main" id="{AF920677-146A-4F0E-8C9B-96FAE661506E}"/>
               </a:ext>
             </a:extLst>
           </p:cNvPr>
@@ -3734,7 +3947,7 @@
           <p:cNvPr id="4" name="Slide Number Placeholder 3">
             <a:extLst xmlns:a="http://schemas.openxmlformats.org/drawingml/2006/main">
               <a:ext uri="{FF2B5EF4-FFF2-40B4-BE49-F238E27FC236}">
-                <a16:creationId xmlns:a16="http://schemas.microsoft.com/office/drawing/2014/main" id="{92B19A91-BFB6-4EED-A167-78A931165908}"/>
+                <a16:creationId xmlns:a16="http://schemas.microsoft.com/office/drawing/2014/main" id="{2DEE0402-BF78-459C-9A7E-765AD441238E}"/>
               </a:ext>
             </a:extLst>
           </p:cNvPr>
@@ -3779,7 +3992,7 @@
           <p:cNvPr id="2" name="Title 1">
             <a:extLst xmlns:a="http://schemas.openxmlformats.org/drawingml/2006/main">
               <a:ext uri="{FF2B5EF4-FFF2-40B4-BE49-F238E27FC236}">
-                <a16:creationId xmlns:a16="http://schemas.microsoft.com/office/drawing/2014/main" id="{35005B3E-B1D8-4AF4-9A08-48B922D85DFF}"/>
+                <a16:creationId xmlns:a16="http://schemas.microsoft.com/office/drawing/2014/main" id="{15D6B32D-5873-40BE-926B-63F77C3C11BC}"/>
               </a:ext>
             </a:extLst>
           </p:cNvPr>
@@ -3816,7 +4029,7 @@
           <p:cNvPr id="3" name="Content Placeholder 2">
             <a:extLst xmlns:a="http://schemas.openxmlformats.org/drawingml/2006/main">
               <a:ext uri="{FF2B5EF4-FFF2-40B4-BE49-F238E27FC236}">
-                <a16:creationId xmlns:a16="http://schemas.microsoft.com/office/drawing/2014/main" id="{BEA463CD-6596-49D8-B7D2-038C93D15462}"/>
+                <a16:creationId xmlns:a16="http://schemas.microsoft.com/office/drawing/2014/main" id="{83EDE0B2-081F-4EA0-993D-75C30D88AB66}"/>
               </a:ext>
             </a:extLst>
           </p:cNvPr>
@@ -3920,7 +4133,7 @@
           <p:cNvPr id="4" name="Text Placeholder 3">
             <a:extLst xmlns:a="http://schemas.openxmlformats.org/drawingml/2006/main">
               <a:ext uri="{FF2B5EF4-FFF2-40B4-BE49-F238E27FC236}">
-                <a16:creationId xmlns:a16="http://schemas.microsoft.com/office/drawing/2014/main" id="{9F3BCD76-3BC3-43DB-8E68-AC1E6FD8CBF0}"/>
+                <a16:creationId xmlns:a16="http://schemas.microsoft.com/office/drawing/2014/main" id="{3094CC85-909A-458C-8040-A159B6EF3577}"/>
               </a:ext>
             </a:extLst>
           </p:cNvPr>
@@ -3992,7 +4205,7 @@
           <p:cNvPr id="5" name="Date Placeholder 4">
             <a:extLst xmlns:a="http://schemas.openxmlformats.org/drawingml/2006/main">
               <a:ext uri="{FF2B5EF4-FFF2-40B4-BE49-F238E27FC236}">
-                <a16:creationId xmlns:a16="http://schemas.microsoft.com/office/drawing/2014/main" id="{44FA86BF-F4BB-439B-9E47-D09C5B53FDBF}"/>
+                <a16:creationId xmlns:a16="http://schemas.microsoft.com/office/drawing/2014/main" id="{56E05E35-7BB2-4130-BD64-F0C7C26BCEE0}"/>
               </a:ext>
             </a:extLst>
           </p:cNvPr>
@@ -4020,7 +4233,7 @@
           <p:cNvPr id="6" name="Footer Placeholder 5">
             <a:extLst xmlns:a="http://schemas.openxmlformats.org/drawingml/2006/main">
               <a:ext uri="{FF2B5EF4-FFF2-40B4-BE49-F238E27FC236}">
-                <a16:creationId xmlns:a16="http://schemas.microsoft.com/office/drawing/2014/main" id="{253253FE-05F0-4A3D-AC10-B2A305CCF485}"/>
+                <a16:creationId xmlns:a16="http://schemas.microsoft.com/office/drawing/2014/main" id="{9D4BF0FC-DE51-46FB-828A-60DBCEB6E873}"/>
               </a:ext>
             </a:extLst>
           </p:cNvPr>
@@ -4045,7 +4258,7 @@
           <p:cNvPr id="7" name="Slide Number Placeholder 6">
             <a:extLst xmlns:a="http://schemas.openxmlformats.org/drawingml/2006/main">
               <a:ext uri="{FF2B5EF4-FFF2-40B4-BE49-F238E27FC236}">
-                <a16:creationId xmlns:a16="http://schemas.microsoft.com/office/drawing/2014/main" id="{F6B433FB-F8C0-4AC2-B218-1CAB8797FF60}"/>
+                <a16:creationId xmlns:a16="http://schemas.microsoft.com/office/drawing/2014/main" id="{33F66402-FF2D-43AE-9DE5-0F86C74EE550}"/>
               </a:ext>
             </a:extLst>
           </p:cNvPr>
@@ -4090,7 +4303,7 @@
           <p:cNvPr id="2" name="Title 1">
             <a:extLst xmlns:a="http://schemas.openxmlformats.org/drawingml/2006/main">
               <a:ext uri="{FF2B5EF4-FFF2-40B4-BE49-F238E27FC236}">
-                <a16:creationId xmlns:a16="http://schemas.microsoft.com/office/drawing/2014/main" id="{97E619D0-1795-4A2C-8ED8-EDCAD326F78E}"/>
+                <a16:creationId xmlns:a16="http://schemas.microsoft.com/office/drawing/2014/main" id="{1896577A-CED3-4DC3-B3A1-5B93A753E3DD}"/>
               </a:ext>
             </a:extLst>
           </p:cNvPr>
@@ -4127,7 +4340,7 @@
           <p:cNvPr id="3" name="Picture Placeholder 2">
             <a:extLst xmlns:a="http://schemas.openxmlformats.org/drawingml/2006/main">
               <a:ext uri="{FF2B5EF4-FFF2-40B4-BE49-F238E27FC236}">
-                <a16:creationId xmlns:a16="http://schemas.microsoft.com/office/drawing/2014/main" id="{0DB09D77-2177-470A-978D-76944E07E912}"/>
+                <a16:creationId xmlns:a16="http://schemas.microsoft.com/office/drawing/2014/main" id="{4FD143E7-6295-4AE8-9FDD-319D7AE38F34}"/>
               </a:ext>
             </a:extLst>
           </p:cNvPr>
@@ -4196,7 +4409,7 @@
           <p:cNvPr id="4" name="Text Placeholder 3">
             <a:extLst xmlns:a="http://schemas.openxmlformats.org/drawingml/2006/main">
               <a:ext uri="{FF2B5EF4-FFF2-40B4-BE49-F238E27FC236}">
-                <a16:creationId xmlns:a16="http://schemas.microsoft.com/office/drawing/2014/main" id="{B8914174-8D74-4EAC-B5DC-F751C8722C42}"/>
+                <a16:creationId xmlns:a16="http://schemas.microsoft.com/office/drawing/2014/main" id="{4D0D416D-93A0-4DB4-B789-F9447F65EAE1}"/>
               </a:ext>
             </a:extLst>
           </p:cNvPr>
@@ -4268,7 +4481,7 @@
           <p:cNvPr id="5" name="Date Placeholder 4">
             <a:extLst xmlns:a="http://schemas.openxmlformats.org/drawingml/2006/main">
               <a:ext uri="{FF2B5EF4-FFF2-40B4-BE49-F238E27FC236}">
-                <a16:creationId xmlns:a16="http://schemas.microsoft.com/office/drawing/2014/main" id="{F604A502-2367-4BB6-BE6F-46BF2F92CF84}"/>
+                <a16:creationId xmlns:a16="http://schemas.microsoft.com/office/drawing/2014/main" id="{3741CA22-5E66-4089-A65C-E69C19DF815A}"/>
               </a:ext>
             </a:extLst>
           </p:cNvPr>
@@ -4296,7 +4509,7 @@
           <p:cNvPr id="6" name="Footer Placeholder 5">
             <a:extLst xmlns:a="http://schemas.openxmlformats.org/drawingml/2006/main">
               <a:ext uri="{FF2B5EF4-FFF2-40B4-BE49-F238E27FC236}">
-                <a16:creationId xmlns:a16="http://schemas.microsoft.com/office/drawing/2014/main" id="{A148BAA1-08A6-4FB3-81CB-DA34E28C2B4D}"/>
+                <a16:creationId xmlns:a16="http://schemas.microsoft.com/office/drawing/2014/main" id="{F34566EC-9FA1-4BDC-8711-180832F3D6FC}"/>
               </a:ext>
             </a:extLst>
           </p:cNvPr>
@@ -4321,7 +4534,7 @@
           <p:cNvPr id="7" name="Slide Number Placeholder 6">
             <a:extLst xmlns:a="http://schemas.openxmlformats.org/drawingml/2006/main">
               <a:ext uri="{FF2B5EF4-FFF2-40B4-BE49-F238E27FC236}">
-                <a16:creationId xmlns:a16="http://schemas.microsoft.com/office/drawing/2014/main" id="{6D8F041D-A7FF-4D0A-BDE4-C6FB3728E324}"/>
+                <a16:creationId xmlns:a16="http://schemas.microsoft.com/office/drawing/2014/main" id="{FD868F21-4744-4DF6-8827-5F25AC8B67FA}"/>
               </a:ext>
             </a:extLst>
           </p:cNvPr>
@@ -4371,7 +4584,7 @@
           <p:cNvPr id="2" name="Title Placeholder 1">
             <a:extLst xmlns:a="http://schemas.openxmlformats.org/drawingml/2006/main">
               <a:ext uri="{FF2B5EF4-FFF2-40B4-BE49-F238E27FC236}">
-                <a16:creationId xmlns:a16="http://schemas.microsoft.com/office/drawing/2014/main" id="{5C2411B1-7FE4-41DD-AACF-17BF2B3381A4}"/>
+                <a16:creationId xmlns:a16="http://schemas.microsoft.com/office/drawing/2014/main" id="{0FFE79A3-1548-4EFB-8A9A-3BAF33DB493F}"/>
               </a:ext>
             </a:extLst>
           </p:cNvPr>
@@ -4406,7 +4619,7 @@
           <p:cNvPr id="3" name="Text Placeholder 2">
             <a:extLst xmlns:a="http://schemas.openxmlformats.org/drawingml/2006/main">
               <a:ext uri="{FF2B5EF4-FFF2-40B4-BE49-F238E27FC236}">
-                <a16:creationId xmlns:a16="http://schemas.microsoft.com/office/drawing/2014/main" id="{47BA4656-13B3-413C-A277-2E41E4630F6C}"/>
+                <a16:creationId xmlns:a16="http://schemas.microsoft.com/office/drawing/2014/main" id="{8DF63FEF-4D76-40CC-A847-CCE8C0B1DAAD}"/>
               </a:ext>
             </a:extLst>
           </p:cNvPr>
@@ -4479,7 +4692,7 @@
           <p:cNvPr id="4" name="Date Placeholder 3">
             <a:extLst xmlns:a="http://schemas.openxmlformats.org/drawingml/2006/main">
               <a:ext uri="{FF2B5EF4-FFF2-40B4-BE49-F238E27FC236}">
-                <a16:creationId xmlns:a16="http://schemas.microsoft.com/office/drawing/2014/main" id="{BF36762C-8C5B-4C62-8C57-33EA310538F2}"/>
+                <a16:creationId xmlns:a16="http://schemas.microsoft.com/office/drawing/2014/main" id="{ED9CFD75-1460-4F46-BEC3-3D52FB78D42C}"/>
               </a:ext>
             </a:extLst>
           </p:cNvPr>
@@ -4526,7 +4739,7 @@
           <p:cNvPr id="5" name="Footer Placeholder 4">
             <a:extLst xmlns:a="http://schemas.openxmlformats.org/drawingml/2006/main">
               <a:ext uri="{FF2B5EF4-FFF2-40B4-BE49-F238E27FC236}">
-                <a16:creationId xmlns:a16="http://schemas.microsoft.com/office/drawing/2014/main" id="{1BAB0C35-51FB-4F3E-8C18-164B391668BA}"/>
+                <a16:creationId xmlns:a16="http://schemas.microsoft.com/office/drawing/2014/main" id="{FCE89934-238F-4EA1-A3E0-13B88AA8BE3D}"/>
               </a:ext>
             </a:extLst>
           </p:cNvPr>
@@ -4570,7 +4783,7 @@
           <p:cNvPr id="6" name="Slide Number Placeholder 5">
             <a:extLst xmlns:a="http://schemas.openxmlformats.org/drawingml/2006/main">
               <a:ext uri="{FF2B5EF4-FFF2-40B4-BE49-F238E27FC236}">
-                <a16:creationId xmlns:a16="http://schemas.microsoft.com/office/drawing/2014/main" id="{75AAB7FF-9CFC-42C7-9E87-245F2CBC5805}"/>
+                <a16:creationId xmlns:a16="http://schemas.microsoft.com/office/drawing/2014/main" id="{C91461ED-AB08-4287-8352-C5CBDAA41CC5}"/>
               </a:ext>
             </a:extLst>
           </p:cNvPr>
@@ -4617,7 +4830,7 @@
           <p:cNvPr id="11" name="Picture 10">
             <a:extLst xmlns:a="http://schemas.openxmlformats.org/drawingml/2006/main">
               <a:ext uri="{FF2B5EF4-FFF2-40B4-BE49-F238E27FC236}">
-                <a16:creationId xmlns:a16="http://schemas.microsoft.com/office/drawing/2014/main" id="{FF8B5E09-C0B9-4F73-B37F-DC913536ED57}"/>
+                <a16:creationId xmlns:a16="http://schemas.microsoft.com/office/drawing/2014/main" id="{3E430F3F-17FC-48EC-B3E1-8A007DEB36CD}"/>
               </a:ext>
             </a:extLst>
           </p:cNvPr>
@@ -4627,7 +4840,7 @@
           <p:nvPr/>
         </p:nvPicPr>
         <p:blipFill>
-          <a:blip xmlns:r="http://schemas.openxmlformats.org/officeDocument/2006/relationships" xmlns:a="http://schemas.openxmlformats.org/drawingml/2006/main" r:embed="R8f3d9ad8972f4a30"/>
+          <a:blip xmlns:r="http://schemas.openxmlformats.org/officeDocument/2006/relationships" xmlns:a="http://schemas.openxmlformats.org/drawingml/2006/main" r:embed="R7895d0fda9244063"/>
           <a:stretch xmlns:a="http://schemas.openxmlformats.org/drawingml/2006/main">
             <a:fillRect l="0" t="0" r="0" b="0"/>
           </a:stretch>
@@ -4646,17 +4859,17 @@
   </p:cSld>
   <p:clrMap bg1="lt1" tx1="dk1" bg2="lt2" tx2="dk2" accent1="accent1" accent2="accent2" accent3="accent3" accent4="accent4" accent5="accent5" accent6="accent6" hlink="hlink" folHlink="folHlink"/>
   <p:sldLayoutIdLst>
-    <p:sldLayoutId xmlns:r="http://schemas.openxmlformats.org/officeDocument/2006/relationships" id="2147483649" r:id="Rf8156f005beb4ca7"/>
-    <p:sldLayoutId xmlns:r="http://schemas.openxmlformats.org/officeDocument/2006/relationships" id="2147483650" r:id="R8ae38867c36246c2"/>
-    <p:sldLayoutId xmlns:r="http://schemas.openxmlformats.org/officeDocument/2006/relationships" id="2147483651" r:id="R839987985ff84c3f"/>
-    <p:sldLayoutId xmlns:r="http://schemas.openxmlformats.org/officeDocument/2006/relationships" id="2147483652" r:id="Rc5e161e3c5054abd"/>
-    <p:sldLayoutId xmlns:r="http://schemas.openxmlformats.org/officeDocument/2006/relationships" id="2147483653" r:id="R46ffa625b52541ea"/>
-    <p:sldLayoutId xmlns:r="http://schemas.openxmlformats.org/officeDocument/2006/relationships" id="2147483654" r:id="R86e2e31c229e42d6"/>
-    <p:sldLayoutId xmlns:r="http://schemas.openxmlformats.org/officeDocument/2006/relationships" id="2147483655" r:id="Ra62cde0b9db24e46"/>
-    <p:sldLayoutId xmlns:r="http://schemas.openxmlformats.org/officeDocument/2006/relationships" id="2147483656" r:id="Rb8a447fb51f743d6"/>
-    <p:sldLayoutId xmlns:r="http://schemas.openxmlformats.org/officeDocument/2006/relationships" id="2147483657" r:id="R170164844fc34a9d"/>
-    <p:sldLayoutId xmlns:r="http://schemas.openxmlformats.org/officeDocument/2006/relationships" id="2147483658" r:id="Rdb2a400d13404169"/>
-    <p:sldLayoutId xmlns:r="http://schemas.openxmlformats.org/officeDocument/2006/relationships" id="2147483659" r:id="R41e358bd0a8a4219"/>
+    <p:sldLayoutId xmlns:r="http://schemas.openxmlformats.org/officeDocument/2006/relationships" id="2147483649" r:id="R7cefc7546951431b"/>
+    <p:sldLayoutId xmlns:r="http://schemas.openxmlformats.org/officeDocument/2006/relationships" id="2147483650" r:id="R433c4d7ff2914e75"/>
+    <p:sldLayoutId xmlns:r="http://schemas.openxmlformats.org/officeDocument/2006/relationships" id="2147483651" r:id="R9bb60518366746d4"/>
+    <p:sldLayoutId xmlns:r="http://schemas.openxmlformats.org/officeDocument/2006/relationships" id="2147483652" r:id="R961c8559209a45b9"/>
+    <p:sldLayoutId xmlns:r="http://schemas.openxmlformats.org/officeDocument/2006/relationships" id="2147483653" r:id="R174d29b8242f4c62"/>
+    <p:sldLayoutId xmlns:r="http://schemas.openxmlformats.org/officeDocument/2006/relationships" id="2147483654" r:id="R7e4688c364de4ce3"/>
+    <p:sldLayoutId xmlns:r="http://schemas.openxmlformats.org/officeDocument/2006/relationships" id="2147483655" r:id="R892ac3b196c24c75"/>
+    <p:sldLayoutId xmlns:r="http://schemas.openxmlformats.org/officeDocument/2006/relationships" id="2147483656" r:id="R1405acdd890e4e55"/>
+    <p:sldLayoutId xmlns:r="http://schemas.openxmlformats.org/officeDocument/2006/relationships" id="2147483657" r:id="Rf6fe9f9844a44b90"/>
+    <p:sldLayoutId xmlns:r="http://schemas.openxmlformats.org/officeDocument/2006/relationships" id="2147483658" r:id="Rbac386800c2f47d3"/>
+    <p:sldLayoutId xmlns:r="http://schemas.openxmlformats.org/officeDocument/2006/relationships" id="2147483659" r:id="Rbbd4488c2e3741d5"/>
   </p:sldLayoutIdLst>
   <p:txStyles>
     <p:titleStyle>
@@ -5280,7 +5493,7 @@
           <p:cNvPr id="2" name="Content Placeholder 2">
             <a:extLst xmlns:a="http://schemas.openxmlformats.org/drawingml/2006/main">
               <a:ext uri="{FF2B5EF4-FFF2-40B4-BE49-F238E27FC236}">
-                <a16:creationId xmlns:a16="http://schemas.microsoft.com/office/drawing/2014/main" id="{BD3AD6A2-01E0-4D2B-8055-F4378782B593}"/>
+                <a16:creationId xmlns:a16="http://schemas.microsoft.com/office/drawing/2014/main" id="{821D3FE4-0D83-46DD-A40C-9ACF503108E5}"/>
               </a:ext>
             </a:extLst>
           </p:cNvPr>
@@ -5300,7 +5513,7 @@
               <a:buNone/>
             </a:pPr>
             <a:r>
-              <a:t>No keeps the row.</a:t>
+              <a:t>Edit opens the selected row.</a:t>
             </a:r>
           </a:p>
           <a:p xmlns:a="http://schemas.openxmlformats.org/drawingml/2006/main">
@@ -5308,7 +5521,7 @@
               <a:buNone/>
             </a:pPr>
             <a:r>
-              <a:t>Yes removes the selected row.</a:t>
+              <a:t>Its values appear in the form.</a:t>
             </a:r>
           </a:p>
         </p:txBody>
@@ -5341,7 +5554,7 @@
           <a:lstStyle xmlns:a="http://schemas.openxmlformats.org/drawingml/2006/main"/>
           <a:p xmlns:a="http://schemas.openxmlformats.org/drawingml/2006/main">
             <a:r>
-              <a:t>Step 5 Check</a:t>
+              <a:t>Step 4: What changed?</a:t>
             </a:r>
             <a:endParaRPr/>
           </a:p>
@@ -5352,7 +5565,7 @@
           <p:cNvPr id="4" name="">
             <a:extLst xmlns:a="http://schemas.openxmlformats.org/drawingml/2006/main">
               <a:ext uri="{FF2B5EF4-FFF2-40B4-BE49-F238E27FC236}">
-                <a16:creationId xmlns:a16="http://schemas.microsoft.com/office/drawing/2014/main" id="{74ACDD98-D2CB-48A0-A746-83625475C03B}"/>
+                <a16:creationId xmlns:a16="http://schemas.microsoft.com/office/drawing/2014/main" id="{895E2AD1-80E4-47A8-9428-3B7F49E0FCC0}"/>
               </a:ext>
             </a:extLst>
           </p:cNvPr>
@@ -5362,7 +5575,7 @@
           <p:nvPr/>
         </p:nvPicPr>
         <p:blipFill>
-          <a:blip xmlns:r="http://schemas.openxmlformats.org/officeDocument/2006/relationships" xmlns:a="http://schemas.openxmlformats.org/drawingml/2006/main" r:embed="R6fe636dd96c14f1a"/>
+          <a:blip xmlns:r="http://schemas.openxmlformats.org/officeDocument/2006/relationships" xmlns:a="http://schemas.openxmlformats.org/drawingml/2006/main" r:embed="R5a5d17a5d5f94667"/>
           <a:stretch xmlns:a="http://schemas.openxmlformats.org/drawingml/2006/main"/>
         </p:blipFill>
         <p:spPr>
@@ -5378,7 +5591,7 @@
     </p:spTree>
     <p:extLst>
       <p:ext uri="{BB962C8B-B14F-4D97-AF65-F5344CB8AC3E}">
-        <p14:creationId xmlns:p14="http://schemas.microsoft.com/office/powerpoint/2010/main" val="2047003807"/>
+        <p14:creationId xmlns:p14="http://schemas.microsoft.com/office/powerpoint/2010/main" val="1627301056"/>
       </p:ext>
     </p:extLst>
   </p:cSld>
@@ -5402,7 +5615,7 @@
           <p:cNvPr id="2" name="Content Placeholder 2">
             <a:extLst xmlns:a="http://schemas.openxmlformats.org/drawingml/2006/main">
               <a:ext uri="{FF2B5EF4-FFF2-40B4-BE49-F238E27FC236}">
-                <a16:creationId xmlns:a16="http://schemas.microsoft.com/office/drawing/2014/main" id="{BD3AD6A2-01E0-4D2B-8055-F4378782B593}"/>
+                <a16:creationId xmlns:a16="http://schemas.microsoft.com/office/drawing/2014/main" id="{821D3FE4-0D83-46DD-A40C-9ACF503108E5}"/>
               </a:ext>
             </a:extLst>
           </p:cNvPr>
@@ -5422,7 +5635,7 @@
               <a:buNone/>
             </a:pPr>
             <a:r>
-              <a:t>Show the completed app workflow.</a:t>
+              <a:t>Delete also receives the row item.</a:t>
             </a:r>
           </a:p>
           <a:p xmlns:a="http://schemas.openxmlformats.org/drawingml/2006/main">
@@ -5430,15 +5643,7 @@
               <a:buNone/>
             </a:pPr>
             <a:r>
-              <a:t>Explain which responsibility changed.</a:t>
-            </a:r>
-          </a:p>
-          <a:p xmlns:a="http://schemas.openxmlformats.org/drawingml/2006/main">
-            <a:pPr lvl="0">
-              <a:buNone/>
-            </a:pPr>
-            <a:r>
-              <a:t>Check the result before the next module.</a:t>
+              <a:t>The page still asks for confirmation.</a:t>
             </a:r>
           </a:p>
         </p:txBody>
@@ -5471,7 +5676,7 @@
           <a:lstStyle xmlns:a="http://schemas.openxmlformats.org/drawingml/2006/main"/>
           <a:p xmlns:a="http://schemas.openxmlformats.org/drawingml/2006/main">
             <a:r>
-              <a:t>Module review</a:t>
+              <a:t>Step 5: Delete command</a:t>
             </a:r>
             <a:endParaRPr/>
           </a:p>
@@ -5480,7 +5685,333 @@
     </p:spTree>
     <p:extLst>
       <p:ext uri="{BB962C8B-B14F-4D97-AF65-F5344CB8AC3E}">
-        <p14:creationId xmlns:p14="http://schemas.microsoft.com/office/powerpoint/2010/main" val="1929222834"/>
+        <p14:creationId xmlns:p14="http://schemas.microsoft.com/office/powerpoint/2010/main" val="1899319463"/>
+      </p:ext>
+    </p:extLst>
+  </p:cSld>
+</p:sld>
+</file>
+
+<file path=ppt/slides/slide12.xml><?xml version="1.0" encoding="utf-8"?>
+<p:sld xmlns:p="http://schemas.openxmlformats.org/presentationml/2006/main">
+  <p:cSld>
+    <p:spTree>
+      <p:nvGrpSpPr>
+        <p:cNvPr id="1" name=""/>
+        <p:cNvGrpSpPr/>
+        <p:nvPr/>
+      </p:nvGrpSpPr>
+      <p:grpSpPr>
+        <a:xfrm xmlns:a="http://schemas.openxmlformats.org/drawingml/2006/main"/>
+      </p:grpSpPr>
+      <p:sp>
+        <p:nvSpPr>
+          <p:cNvPr id="2" name="Content Placeholder 2">
+            <a:extLst xmlns:a="http://schemas.openxmlformats.org/drawingml/2006/main">
+              <a:ext uri="{FF2B5EF4-FFF2-40B4-BE49-F238E27FC236}">
+                <a16:creationId xmlns:a16="http://schemas.microsoft.com/office/drawing/2014/main" id="{821D3FE4-0D83-46DD-A40C-9ACF503108E5}"/>
+              </a:ext>
+            </a:extLst>
+          </p:cNvPr>
+          <p:cNvSpPr>
+            <a:spLocks xmlns:a="http://schemas.openxmlformats.org/drawingml/2006/main" noGrp="1"/>
+          </p:cNvSpPr>
+          <p:nvPr>
+            <p:ph idx="1"/>
+          </p:nvPr>
+        </p:nvSpPr>
+        <p:spPr/>
+        <p:txBody>
+          <a:bodyPr xmlns:a="http://schemas.openxmlformats.org/drawingml/2006/main"/>
+          <a:lstStyle xmlns:a="http://schemas.openxmlformats.org/drawingml/2006/main"/>
+          <a:p xmlns:a="http://schemas.openxmlformats.org/drawingml/2006/main">
+            <a:pPr lvl="0">
+              <a:buNone/>
+            </a:pPr>
+            <a:r>
+              <a:t>No keeps the row.</a:t>
+            </a:r>
+          </a:p>
+          <a:p xmlns:a="http://schemas.openxmlformats.org/drawingml/2006/main">
+            <a:pPr lvl="0">
+              <a:buNone/>
+            </a:pPr>
+            <a:r>
+              <a:t>Yes removes the selected row.</a:t>
+            </a:r>
+          </a:p>
+        </p:txBody>
+      </p:sp>
+      <p:sp>
+        <p:nvSpPr>
+          <p:cNvPr id="3" name="Title Placeholder 1">
+            <a:extLst xmlns:a="http://schemas.openxmlformats.org/drawingml/2006/main">
+              <a:ext uri="{FF2B5EF4-FFF2-40B4-BE49-F238E27FC236}">
+                <a16:creationId xmlns:a16="http://schemas.microsoft.com/office/drawing/2014/main" id="{2DF4F548-EDEF-186D-6633-AF1ABC814BC1}"/>
+              </a:ext>
+            </a:extLst>
+          </p:cNvPr>
+          <p:cNvSpPr>
+            <a:spLocks xmlns:a="http://schemas.openxmlformats.org/drawingml/2006/main" noGrp="1"/>
+          </p:cNvSpPr>
+          <p:nvPr>
+            <p:ph type="title" idx="0"/>
+          </p:nvPr>
+        </p:nvSpPr>
+        <p:spPr>
+          <a:prstGeom xmlns:a="http://schemas.openxmlformats.org/drawingml/2006/main" prst="rect">
+            <a:avLst/>
+          </a:prstGeom>
+        </p:spPr>
+        <p:txBody>
+          <a:bodyPr xmlns:a="http://schemas.openxmlformats.org/drawingml/2006/main" vert="horz" lIns="91440" tIns="45720" rIns="91440" bIns="45720" anchor="ctr">
+            <a:normAutofit fontScale="100000"/>
+          </a:bodyPr>
+          <a:lstStyle xmlns:a="http://schemas.openxmlformats.org/drawingml/2006/main"/>
+          <a:p xmlns:a="http://schemas.openxmlformats.org/drawingml/2006/main">
+            <a:r>
+              <a:t>Step 5: What changed?</a:t>
+            </a:r>
+            <a:endParaRPr/>
+          </a:p>
+        </p:txBody>
+      </p:sp>
+      <p:pic>
+        <p:nvPicPr>
+          <p:cNvPr id="4" name="">
+            <a:extLst xmlns:a="http://schemas.openxmlformats.org/drawingml/2006/main">
+              <a:ext uri="{FF2B5EF4-FFF2-40B4-BE49-F238E27FC236}">
+                <a16:creationId xmlns:a16="http://schemas.microsoft.com/office/drawing/2014/main" id="{989B0986-14F1-4F19-A535-D9AA5BCA5049}"/>
+              </a:ext>
+            </a:extLst>
+          </p:cNvPr>
+          <p:cNvPicPr>
+            <a:picLocks xmlns:a="http://schemas.openxmlformats.org/drawingml/2006/main" noChangeAspect="1"/>
+          </p:cNvPicPr>
+          <p:nvPr/>
+        </p:nvPicPr>
+        <p:blipFill>
+          <a:blip xmlns:r="http://schemas.openxmlformats.org/officeDocument/2006/relationships" xmlns:a="http://schemas.openxmlformats.org/drawingml/2006/main" r:embed="Rb384697c487640e5"/>
+          <a:stretch xmlns:a="http://schemas.openxmlformats.org/drawingml/2006/main"/>
+        </p:blipFill>
+        <p:spPr>
+          <a:xfrm xmlns:a="http://schemas.openxmlformats.org/drawingml/2006/main">
+            <a:off x="3505200" y="3190875"/>
+            <a:ext cx="5181600" cy="3048000"/>
+          </a:xfrm>
+          <a:prstGeom xmlns:a="http://schemas.openxmlformats.org/drawingml/2006/main" prst="rect">
+            <a:avLst/>
+          </a:prstGeom>
+        </p:spPr>
+      </p:pic>
+    </p:spTree>
+    <p:extLst>
+      <p:ext uri="{BB962C8B-B14F-4D97-AF65-F5344CB8AC3E}">
+        <p14:creationId xmlns:p14="http://schemas.microsoft.com/office/powerpoint/2010/main" val="1618802914"/>
+      </p:ext>
+    </p:extLst>
+  </p:cSld>
+</p:sld>
+</file>
+
+<file path=ppt/slides/slide13.xml><?xml version="1.0" encoding="utf-8"?>
+<p:sld xmlns:p="http://schemas.openxmlformats.org/presentationml/2006/main">
+  <p:cSld>
+    <p:spTree>
+      <p:nvGrpSpPr>
+        <p:cNvPr id="1" name=""/>
+        <p:cNvGrpSpPr/>
+        <p:nvPr/>
+      </p:nvGrpSpPr>
+      <p:grpSpPr>
+        <a:xfrm xmlns:a="http://schemas.openxmlformats.org/drawingml/2006/main"/>
+      </p:grpSpPr>
+      <p:sp>
+        <p:nvSpPr>
+          <p:cNvPr id="2" name="Content Placeholder 2">
+            <a:extLst xmlns:a="http://schemas.openxmlformats.org/drawingml/2006/main">
+              <a:ext uri="{FF2B5EF4-FFF2-40B4-BE49-F238E27FC236}">
+                <a16:creationId xmlns:a16="http://schemas.microsoft.com/office/drawing/2014/main" id="{821D3FE4-0D83-46DD-A40C-9ACF503108E5}"/>
+              </a:ext>
+            </a:extLst>
+          </p:cNvPr>
+          <p:cNvSpPr>
+            <a:spLocks xmlns:a="http://schemas.openxmlformats.org/drawingml/2006/main" noGrp="1"/>
+          </p:cNvSpPr>
+          <p:nvPr>
+            <p:ph idx="1"/>
+          </p:nvPr>
+        </p:nvSpPr>
+        <p:spPr/>
+        <p:txBody>
+          <a:bodyPr xmlns:a="http://schemas.openxmlformats.org/drawingml/2006/main"/>
+          <a:lstStyle xmlns:a="http://schemas.openxmlformats.org/drawingml/2006/main"/>
+          <a:p xmlns:a="http://schemas.openxmlformats.org/drawingml/2006/main">
+            <a:pPr lvl="0">
+              <a:buNone/>
+            </a:pPr>
+            <a:r>
+              <a:t>I can identify the BindingContext inside a row.</a:t>
+            </a:r>
+          </a:p>
+          <a:p xmlns:a="http://schemas.openxmlformats.org/drawingml/2006/main">
+            <a:pPr lvl="0">
+              <a:buNone/>
+            </a:pPr>
+            <a:r>
+              <a:t>I can trace one Edit command parameter.</a:t>
+            </a:r>
+          </a:p>
+          <a:p xmlns:a="http://schemas.openxmlformats.org/drawingml/2006/main">
+            <a:pPr lvl="0">
+              <a:buNone/>
+            </a:pPr>
+            <a:r>
+              <a:t>I can explain why list refresh is still manual.</a:t>
+            </a:r>
+          </a:p>
+        </p:txBody>
+      </p:sp>
+      <p:sp>
+        <p:nvSpPr>
+          <p:cNvPr id="3" name="Title Placeholder 1">
+            <a:extLst xmlns:a="http://schemas.openxmlformats.org/drawingml/2006/main">
+              <a:ext uri="{FF2B5EF4-FFF2-40B4-BE49-F238E27FC236}">
+                <a16:creationId xmlns:a16="http://schemas.microsoft.com/office/drawing/2014/main" id="{2DF4F548-EDEF-186D-6633-AF1ABC814BC1}"/>
+              </a:ext>
+            </a:extLst>
+          </p:cNvPr>
+          <p:cNvSpPr>
+            <a:spLocks xmlns:a="http://schemas.openxmlformats.org/drawingml/2006/main" noGrp="1"/>
+          </p:cNvSpPr>
+          <p:nvPr>
+            <p:ph type="title" idx="0"/>
+          </p:nvPr>
+        </p:nvSpPr>
+        <p:spPr>
+          <a:prstGeom xmlns:a="http://schemas.openxmlformats.org/drawingml/2006/main" prst="rect">
+            <a:avLst/>
+          </a:prstGeom>
+        </p:spPr>
+        <p:txBody>
+          <a:bodyPr xmlns:a="http://schemas.openxmlformats.org/drawingml/2006/main" vert="horz" lIns="91440" tIns="45720" rIns="91440" bIns="45720" anchor="ctr">
+            <a:normAutofit fontScale="100000"/>
+          </a:bodyPr>
+          <a:lstStyle xmlns:a="http://schemas.openxmlformats.org/drawingml/2006/main"/>
+          <a:p xmlns:a="http://schemas.openxmlformats.org/drawingml/2006/main">
+            <a:r>
+              <a:t>What you can now explain</a:t>
+            </a:r>
+            <a:endParaRPr/>
+          </a:p>
+        </p:txBody>
+      </p:sp>
+    </p:spTree>
+    <p:extLst>
+      <p:ext uri="{BB962C8B-B14F-4D97-AF65-F5344CB8AC3E}">
+        <p14:creationId xmlns:p14="http://schemas.microsoft.com/office/powerpoint/2010/main" val="920519758"/>
+      </p:ext>
+    </p:extLst>
+  </p:cSld>
+</p:sld>
+</file>
+
+<file path=ppt/slides/slide14.xml><?xml version="1.0" encoding="utf-8"?>
+<p:sld xmlns:p="http://schemas.openxmlformats.org/presentationml/2006/main">
+  <p:cSld>
+    <p:spTree>
+      <p:nvGrpSpPr>
+        <p:cNvPr id="1" name=""/>
+        <p:cNvGrpSpPr/>
+        <p:nvPr/>
+      </p:nvGrpSpPr>
+      <p:grpSpPr>
+        <a:xfrm xmlns:a="http://schemas.openxmlformats.org/drawingml/2006/main"/>
+      </p:grpSpPr>
+      <p:sp>
+        <p:nvSpPr>
+          <p:cNvPr id="2" name="Content Placeholder 2">
+            <a:extLst xmlns:a="http://schemas.openxmlformats.org/drawingml/2006/main">
+              <a:ext uri="{FF2B5EF4-FFF2-40B4-BE49-F238E27FC236}">
+                <a16:creationId xmlns:a16="http://schemas.microsoft.com/office/drawing/2014/main" id="{821D3FE4-0D83-46DD-A40C-9ACF503108E5}"/>
+              </a:ext>
+            </a:extLst>
+          </p:cNvPr>
+          <p:cNvSpPr>
+            <a:spLocks xmlns:a="http://schemas.openxmlformats.org/drawingml/2006/main" noGrp="1"/>
+          </p:cNvSpPr>
+          <p:nvPr>
+            <p:ph idx="1"/>
+          </p:nvPr>
+        </p:nvSpPr>
+        <p:spPr/>
+        <p:txBody>
+          <a:bodyPr xmlns:a="http://schemas.openxmlformats.org/drawingml/2006/main"/>
+          <a:lstStyle xmlns:a="http://schemas.openxmlformats.org/drawingml/2006/main"/>
+          <a:p xmlns:a="http://schemas.openxmlformats.org/drawingml/2006/main">
+            <a:pPr lvl="0">
+              <a:buNone/>
+            </a:pPr>
+            <a:r>
+              <a:t>Binding context and CollectionView</a:t>
+            </a:r>
+          </a:p>
+          <a:p xmlns:a="http://schemas.openxmlformats.org/drawingml/2006/main">
+            <a:pPr lvl="0">
+              <a:buNone/>
+            </a:pPr>
+            <a:r>
+              <a:t>Search Microsoft Learn for this topic.</a:t>
+            </a:r>
+          </a:p>
+          <a:p xmlns:a="http://schemas.openxmlformats.org/drawingml/2006/main">
+            <a:pPr lvl="0">
+              <a:buNone/>
+            </a:pPr>
+            <a:r>
+              <a:t>Try one example in a small test page.</a:t>
+            </a:r>
+          </a:p>
+        </p:txBody>
+      </p:sp>
+      <p:sp>
+        <p:nvSpPr>
+          <p:cNvPr id="3" name="Title Placeholder 1">
+            <a:extLst xmlns:a="http://schemas.openxmlformats.org/drawingml/2006/main">
+              <a:ext uri="{FF2B5EF4-FFF2-40B4-BE49-F238E27FC236}">
+                <a16:creationId xmlns:a16="http://schemas.microsoft.com/office/drawing/2014/main" id="{2DF4F548-EDEF-186D-6633-AF1ABC814BC1}"/>
+              </a:ext>
+            </a:extLst>
+          </p:cNvPr>
+          <p:cNvSpPr>
+            <a:spLocks xmlns:a="http://schemas.openxmlformats.org/drawingml/2006/main" noGrp="1"/>
+          </p:cNvSpPr>
+          <p:nvPr>
+            <p:ph type="title" idx="0"/>
+          </p:nvPr>
+        </p:nvSpPr>
+        <p:spPr>
+          <a:prstGeom xmlns:a="http://schemas.openxmlformats.org/drawingml/2006/main" prst="rect">
+            <a:avLst/>
+          </a:prstGeom>
+        </p:spPr>
+        <p:txBody>
+          <a:bodyPr xmlns:a="http://schemas.openxmlformats.org/drawingml/2006/main" vert="horz" lIns="91440" tIns="45720" rIns="91440" bIns="45720" anchor="ctr">
+            <a:normAutofit fontScale="100000"/>
+          </a:bodyPr>
+          <a:lstStyle xmlns:a="http://schemas.openxmlformats.org/drawingml/2006/main"/>
+          <a:p xmlns:a="http://schemas.openxmlformats.org/drawingml/2006/main">
+            <a:r>
+              <a:t>Read more in MAUI documentation</a:t>
+            </a:r>
+            <a:endParaRPr/>
+          </a:p>
+        </p:txBody>
+      </p:sp>
+    </p:spTree>
+    <p:extLst>
+      <p:ext uri="{BB962C8B-B14F-4D97-AF65-F5344CB8AC3E}">
+        <p14:creationId xmlns:p14="http://schemas.microsoft.com/office/powerpoint/2010/main" val="472050580"/>
       </p:ext>
     </p:extLst>
   </p:cSld>
@@ -5504,7 +6035,7 @@
           <p:cNvPr id="2" name="Content Placeholder 2">
             <a:extLst xmlns:a="http://schemas.openxmlformats.org/drawingml/2006/main">
               <a:ext uri="{FF2B5EF4-FFF2-40B4-BE49-F238E27FC236}">
-                <a16:creationId xmlns:a16="http://schemas.microsoft.com/office/drawing/2014/main" id="{BD3AD6A2-01E0-4D2B-8055-F4378782B593}"/>
+                <a16:creationId xmlns:a16="http://schemas.microsoft.com/office/drawing/2014/main" id="{821D3FE4-0D83-46DD-A40C-9ACF503108E5}"/>
               </a:ext>
             </a:extLst>
           </p:cNvPr>
@@ -5573,7 +6104,7 @@
           <a:lstStyle xmlns:a="http://schemas.openxmlformats.org/drawingml/2006/main"/>
           <a:p xmlns:a="http://schemas.openxmlformats.org/drawingml/2006/main">
             <a:r>
-              <a:t>Exercise overview</a:t>
+              <a:t>What you will build</a:t>
             </a:r>
             <a:endParaRPr/>
           </a:p>
@@ -5582,7 +6113,7 @@
     </p:spTree>
     <p:extLst>
       <p:ext uri="{BB962C8B-B14F-4D97-AF65-F5344CB8AC3E}">
-        <p14:creationId xmlns:p14="http://schemas.microsoft.com/office/powerpoint/2010/main" val="438865171"/>
+        <p14:creationId xmlns:p14="http://schemas.microsoft.com/office/powerpoint/2010/main" val="211264047"/>
       </p:ext>
     </p:extLst>
   </p:cSld>
@@ -5606,7 +6137,7 @@
           <p:cNvPr id="2" name="Content Placeholder 2">
             <a:extLst xmlns:a="http://schemas.openxmlformats.org/drawingml/2006/main">
               <a:ext uri="{FF2B5EF4-FFF2-40B4-BE49-F238E27FC236}">
-                <a16:creationId xmlns:a16="http://schemas.microsoft.com/office/drawing/2014/main" id="{BD3AD6A2-01E0-4D2B-8055-F4378782B593}"/>
+                <a16:creationId xmlns:a16="http://schemas.microsoft.com/office/drawing/2014/main" id="{821D3FE4-0D83-46DD-A40C-9ACF503108E5}"/>
               </a:ext>
             </a:extLst>
           </p:cNvPr>
@@ -5626,7 +6157,7 @@
               <a:buNone/>
             </a:pPr>
             <a:r>
-              <a:t>The BOM view model owns the item list.</a:t>
+              <a:t>The page BindingContext is the BOM view model.</a:t>
             </a:r>
           </a:p>
           <a:p xmlns:a="http://schemas.openxmlformats.org/drawingml/2006/main">
@@ -5634,7 +6165,15 @@
               <a:buNone/>
             </a:pPr>
             <a:r>
-              <a:t>The page binds to its Items property.</a:t>
+              <a:t>A row template BindingContext is its MaterialItem.</a:t>
+            </a:r>
+          </a:p>
+          <a:p xmlns:a="http://schemas.openxmlformats.org/drawingml/2006/main">
+            <a:pPr lvl="0">
+              <a:buNone/>
+            </a:pPr>
+            <a:r>
+              <a:t>A row button needs both its row item and a page command.</a:t>
             </a:r>
           </a:p>
         </p:txBody>
@@ -5667,16 +6206,44 @@
           <a:lstStyle xmlns:a="http://schemas.openxmlformats.org/drawingml/2006/main"/>
           <a:p xmlns:a="http://schemas.openxmlformats.org/drawingml/2006/main">
             <a:r>
-              <a:t>Step 1 List ownership</a:t>
+              <a:t>Each row has two useful contexts</a:t>
             </a:r>
             <a:endParaRPr/>
           </a:p>
         </p:txBody>
       </p:sp>
+      <p:pic>
+        <p:nvPicPr>
+          <p:cNvPr id="4" name="">
+            <a:extLst xmlns:a="http://schemas.openxmlformats.org/drawingml/2006/main">
+              <a:ext uri="{FF2B5EF4-FFF2-40B4-BE49-F238E27FC236}">
+                <a16:creationId xmlns:a16="http://schemas.microsoft.com/office/drawing/2014/main" id="{27CB4B1B-7F08-4450-8F35-D8419036C339}"/>
+              </a:ext>
+            </a:extLst>
+          </p:cNvPr>
+          <p:cNvPicPr>
+            <a:picLocks xmlns:a="http://schemas.openxmlformats.org/drawingml/2006/main" noChangeAspect="1"/>
+          </p:cNvPicPr>
+          <p:nvPr/>
+        </p:nvPicPr>
+        <p:blipFill>
+          <a:blip xmlns:r="http://schemas.openxmlformats.org/officeDocument/2006/relationships" xmlns:a="http://schemas.openxmlformats.org/drawingml/2006/main" r:embed="R8a73b4663a4e4c3c"/>
+          <a:stretch xmlns:a="http://schemas.openxmlformats.org/drawingml/2006/main"/>
+        </p:blipFill>
+        <p:spPr>
+          <a:xfrm xmlns:a="http://schemas.openxmlformats.org/drawingml/2006/main">
+            <a:off x="3505200" y="3190875"/>
+            <a:ext cx="5181600" cy="3048000"/>
+          </a:xfrm>
+          <a:prstGeom xmlns:a="http://schemas.openxmlformats.org/drawingml/2006/main" prst="rect">
+            <a:avLst/>
+          </a:prstGeom>
+        </p:spPr>
+      </p:pic>
     </p:spTree>
     <p:extLst>
       <p:ext uri="{BB962C8B-B14F-4D97-AF65-F5344CB8AC3E}">
-        <p14:creationId xmlns:p14="http://schemas.microsoft.com/office/powerpoint/2010/main" val="1546832396"/>
+        <p14:creationId xmlns:p14="http://schemas.microsoft.com/office/powerpoint/2010/main" val="544468024"/>
       </p:ext>
     </p:extLst>
   </p:cSld>
@@ -5700,7 +6267,7 @@
           <p:cNvPr id="2" name="Content Placeholder 2">
             <a:extLst xmlns:a="http://schemas.openxmlformats.org/drawingml/2006/main">
               <a:ext uri="{FF2B5EF4-FFF2-40B4-BE49-F238E27FC236}">
-                <a16:creationId xmlns:a16="http://schemas.microsoft.com/office/drawing/2014/main" id="{BD3AD6A2-01E0-4D2B-8055-F4378782B593}"/>
+                <a16:creationId xmlns:a16="http://schemas.microsoft.com/office/drawing/2014/main" id="{821D3FE4-0D83-46DD-A40C-9ACF503108E5}"/>
               </a:ext>
             </a:extLst>
           </p:cNvPr>
@@ -5720,7 +6287,7 @@
               <a:buNone/>
             </a:pPr>
             <a:r>
-              <a:t>The same rows still appear.</a:t>
+              <a:t>CommandParameter carries the selected MaterialItem.</a:t>
             </a:r>
           </a:p>
           <a:p xmlns:a="http://schemas.openxmlformats.org/drawingml/2006/main">
@@ -5728,7 +6295,15 @@
               <a:buNone/>
             </a:pPr>
             <a:r>
-              <a:t>The page no longer stores the list.</a:t>
+              <a:t>The command handles the list decision.</a:t>
+            </a:r>
+          </a:p>
+          <a:p xmlns:a="http://schemas.openxmlformats.org/drawingml/2006/main">
+            <a:pPr lvl="0">
+              <a:buNone/>
+            </a:pPr>
+            <a:r>
+              <a:t>The page provides the editor and confirmation UI.</a:t>
             </a:r>
           </a:p>
         </p:txBody>
@@ -5761,44 +6336,16 @@
           <a:lstStyle xmlns:a="http://schemas.openxmlformats.org/drawingml/2006/main"/>
           <a:p xmlns:a="http://schemas.openxmlformats.org/drawingml/2006/main">
             <a:r>
-              <a:t>Step 1 Check</a:t>
+              <a:t>From C# to the screen</a:t>
             </a:r>
             <a:endParaRPr/>
           </a:p>
         </p:txBody>
       </p:sp>
-      <p:pic>
-        <p:nvPicPr>
-          <p:cNvPr id="4" name="">
-            <a:extLst xmlns:a="http://schemas.openxmlformats.org/drawingml/2006/main">
-              <a:ext uri="{FF2B5EF4-FFF2-40B4-BE49-F238E27FC236}">
-                <a16:creationId xmlns:a16="http://schemas.microsoft.com/office/drawing/2014/main" id="{2470172B-DF82-4931-8A1A-84578BCEE6C9}"/>
-              </a:ext>
-            </a:extLst>
-          </p:cNvPr>
-          <p:cNvPicPr>
-            <a:picLocks xmlns:a="http://schemas.openxmlformats.org/drawingml/2006/main" noChangeAspect="1"/>
-          </p:cNvPicPr>
-          <p:nvPr/>
-        </p:nvPicPr>
-        <p:blipFill>
-          <a:blip xmlns:r="http://schemas.openxmlformats.org/officeDocument/2006/relationships" xmlns:a="http://schemas.openxmlformats.org/drawingml/2006/main" r:embed="Ree7bf7bce1a34e5c"/>
-          <a:stretch xmlns:a="http://schemas.openxmlformats.org/drawingml/2006/main"/>
-        </p:blipFill>
-        <p:spPr>
-          <a:xfrm xmlns:a="http://schemas.openxmlformats.org/drawingml/2006/main">
-            <a:off x="3505200" y="3190875"/>
-            <a:ext cx="5181600" cy="3048000"/>
-          </a:xfrm>
-          <a:prstGeom xmlns:a="http://schemas.openxmlformats.org/drawingml/2006/main" prst="rect">
-            <a:avLst/>
-          </a:prstGeom>
-        </p:spPr>
-      </p:pic>
     </p:spTree>
     <p:extLst>
       <p:ext uri="{BB962C8B-B14F-4D97-AF65-F5344CB8AC3E}">
-        <p14:creationId xmlns:p14="http://schemas.microsoft.com/office/powerpoint/2010/main" val="1694537285"/>
+        <p14:creationId xmlns:p14="http://schemas.microsoft.com/office/powerpoint/2010/main" val="1797344398"/>
       </p:ext>
     </p:extLst>
   </p:cSld>
@@ -5822,7 +6369,7 @@
           <p:cNvPr id="2" name="Content Placeholder 2">
             <a:extLst xmlns:a="http://schemas.openxmlformats.org/drawingml/2006/main">
               <a:ext uri="{FF2B5EF4-FFF2-40B4-BE49-F238E27FC236}">
-                <a16:creationId xmlns:a16="http://schemas.microsoft.com/office/drawing/2014/main" id="{BD3AD6A2-01E0-4D2B-8055-F4378782B593}"/>
+                <a16:creationId xmlns:a16="http://schemas.microsoft.com/office/drawing/2014/main" id="{821D3FE4-0D83-46DD-A40C-9ACF503108E5}"/>
               </a:ext>
             </a:extLst>
           </p:cNvPr>
@@ -5842,7 +6389,7 @@
               <a:buNone/>
             </a:pPr>
             <a:r>
-              <a:t>The Add button binds to a command.</a:t>
+              <a:t>The BOM view model owns the item list.</a:t>
             </a:r>
           </a:p>
           <a:p xmlns:a="http://schemas.openxmlformats.org/drawingml/2006/main">
@@ -5850,7 +6397,7 @@
               <a:buNone/>
             </a:pPr>
             <a:r>
-              <a:t>The view model requests the editor.</a:t>
+              <a:t>The page binds to its Items property.</a:t>
             </a:r>
           </a:p>
         </p:txBody>
@@ -5883,7 +6430,7 @@
           <a:lstStyle xmlns:a="http://schemas.openxmlformats.org/drawingml/2006/main"/>
           <a:p xmlns:a="http://schemas.openxmlformats.org/drawingml/2006/main">
             <a:r>
-              <a:t>Step 2 Add command</a:t>
+              <a:t>Step 1: List ownership</a:t>
             </a:r>
             <a:endParaRPr/>
           </a:p>
@@ -5892,7 +6439,7 @@
     </p:spTree>
     <p:extLst>
       <p:ext uri="{BB962C8B-B14F-4D97-AF65-F5344CB8AC3E}">
-        <p14:creationId xmlns:p14="http://schemas.microsoft.com/office/powerpoint/2010/main" val="1839529384"/>
+        <p14:creationId xmlns:p14="http://schemas.microsoft.com/office/powerpoint/2010/main" val="235974026"/>
       </p:ext>
     </p:extLst>
   </p:cSld>
@@ -5916,7 +6463,7 @@
           <p:cNvPr id="2" name="Content Placeholder 2">
             <a:extLst xmlns:a="http://schemas.openxmlformats.org/drawingml/2006/main">
               <a:ext uri="{FF2B5EF4-FFF2-40B4-BE49-F238E27FC236}">
-                <a16:creationId xmlns:a16="http://schemas.microsoft.com/office/drawing/2014/main" id="{BD3AD6A2-01E0-4D2B-8055-F4378782B593}"/>
+                <a16:creationId xmlns:a16="http://schemas.microsoft.com/office/drawing/2014/main" id="{821D3FE4-0D83-46DD-A40C-9ACF503108E5}"/>
               </a:ext>
             </a:extLst>
           </p:cNvPr>
@@ -5936,7 +6483,7 @@
               <a:buNone/>
             </a:pPr>
             <a:r>
-              <a:t>Add opens a blank editor.</a:t>
+              <a:t>The same rows still appear.</a:t>
             </a:r>
           </a:p>
           <a:p xmlns:a="http://schemas.openxmlformats.org/drawingml/2006/main">
@@ -5944,7 +6491,7 @@
               <a:buNone/>
             </a:pPr>
             <a:r>
-              <a:t>Submit adds the returned item.</a:t>
+              <a:t>The page no longer stores the list.</a:t>
             </a:r>
           </a:p>
         </p:txBody>
@@ -5977,44 +6524,16 @@
           <a:lstStyle xmlns:a="http://schemas.openxmlformats.org/drawingml/2006/main"/>
           <a:p xmlns:a="http://schemas.openxmlformats.org/drawingml/2006/main">
             <a:r>
-              <a:t>Step 2 Check</a:t>
+              <a:t>Step 1: What changed?</a:t>
             </a:r>
             <a:endParaRPr/>
           </a:p>
         </p:txBody>
       </p:sp>
-      <p:pic>
-        <p:nvPicPr>
-          <p:cNvPr id="4" name="">
-            <a:extLst xmlns:a="http://schemas.openxmlformats.org/drawingml/2006/main">
-              <a:ext uri="{FF2B5EF4-FFF2-40B4-BE49-F238E27FC236}">
-                <a16:creationId xmlns:a16="http://schemas.microsoft.com/office/drawing/2014/main" id="{F425D377-307A-4FE3-9DC6-07526C36D2AE}"/>
-              </a:ext>
-            </a:extLst>
-          </p:cNvPr>
-          <p:cNvPicPr>
-            <a:picLocks xmlns:a="http://schemas.openxmlformats.org/drawingml/2006/main" noChangeAspect="1"/>
-          </p:cNvPicPr>
-          <p:nvPr/>
-        </p:nvPicPr>
-        <p:blipFill>
-          <a:blip xmlns:r="http://schemas.openxmlformats.org/officeDocument/2006/relationships" xmlns:a="http://schemas.openxmlformats.org/drawingml/2006/main" r:embed="R931bdbc50a114a08"/>
-          <a:stretch xmlns:a="http://schemas.openxmlformats.org/drawingml/2006/main"/>
-        </p:blipFill>
-        <p:spPr>
-          <a:xfrm xmlns:a="http://schemas.openxmlformats.org/drawingml/2006/main">
-            <a:off x="3505200" y="3190875"/>
-            <a:ext cx="5181600" cy="3048000"/>
-          </a:xfrm>
-          <a:prstGeom xmlns:a="http://schemas.openxmlformats.org/drawingml/2006/main" prst="rect">
-            <a:avLst/>
-          </a:prstGeom>
-        </p:spPr>
-      </p:pic>
     </p:spTree>
     <p:extLst>
       <p:ext uri="{BB962C8B-B14F-4D97-AF65-F5344CB8AC3E}">
-        <p14:creationId xmlns:p14="http://schemas.microsoft.com/office/powerpoint/2010/main" val="1502394017"/>
+        <p14:creationId xmlns:p14="http://schemas.microsoft.com/office/powerpoint/2010/main" val="148020699"/>
       </p:ext>
     </p:extLst>
   </p:cSld>
@@ -6038,7 +6557,7 @@
           <p:cNvPr id="2" name="Content Placeholder 2">
             <a:extLst xmlns:a="http://schemas.openxmlformats.org/drawingml/2006/main">
               <a:ext uri="{FF2B5EF4-FFF2-40B4-BE49-F238E27FC236}">
-                <a16:creationId xmlns:a16="http://schemas.microsoft.com/office/drawing/2014/main" id="{BD3AD6A2-01E0-4D2B-8055-F4378782B593}"/>
+                <a16:creationId xmlns:a16="http://schemas.microsoft.com/office/drawing/2014/main" id="{821D3FE4-0D83-46DD-A40C-9ACF503108E5}"/>
               </a:ext>
             </a:extLst>
           </p:cNvPr>
@@ -6058,7 +6577,7 @@
               <a:buNone/>
             </a:pPr>
             <a:r>
-              <a:t>Each row has its own MaterialItem.</a:t>
+              <a:t>The Add button binds to a command.</a:t>
             </a:r>
           </a:p>
           <a:p xmlns:a="http://schemas.openxmlformats.org/drawingml/2006/main">
@@ -6066,7 +6585,7 @@
               <a:buNone/>
             </a:pPr>
             <a:r>
-              <a:t>CommandParameter passes that item to Edit.</a:t>
+              <a:t>The view model requests the editor.</a:t>
             </a:r>
           </a:p>
         </p:txBody>
@@ -6099,7 +6618,7 @@
           <a:lstStyle xmlns:a="http://schemas.openxmlformats.org/drawingml/2006/main"/>
           <a:p xmlns:a="http://schemas.openxmlformats.org/drawingml/2006/main">
             <a:r>
-              <a:t>Step 4 CommandParameter</a:t>
+              <a:t>Step 2: Add command</a:t>
             </a:r>
             <a:endParaRPr/>
           </a:p>
@@ -6108,7 +6627,7 @@
     </p:spTree>
     <p:extLst>
       <p:ext uri="{BB962C8B-B14F-4D97-AF65-F5344CB8AC3E}">
-        <p14:creationId xmlns:p14="http://schemas.microsoft.com/office/powerpoint/2010/main" val="1330373110"/>
+        <p14:creationId xmlns:p14="http://schemas.microsoft.com/office/powerpoint/2010/main" val="1785023192"/>
       </p:ext>
     </p:extLst>
   </p:cSld>
@@ -6132,7 +6651,7 @@
           <p:cNvPr id="2" name="Content Placeholder 2">
             <a:extLst xmlns:a="http://schemas.openxmlformats.org/drawingml/2006/main">
               <a:ext uri="{FF2B5EF4-FFF2-40B4-BE49-F238E27FC236}">
-                <a16:creationId xmlns:a16="http://schemas.microsoft.com/office/drawing/2014/main" id="{BD3AD6A2-01E0-4D2B-8055-F4378782B593}"/>
+                <a16:creationId xmlns:a16="http://schemas.microsoft.com/office/drawing/2014/main" id="{821D3FE4-0D83-46DD-A40C-9ACF503108E5}"/>
               </a:ext>
             </a:extLst>
           </p:cNvPr>
@@ -6152,7 +6671,7 @@
               <a:buNone/>
             </a:pPr>
             <a:r>
-              <a:t>Edit opens the selected row.</a:t>
+              <a:t>Add opens a blank editor.</a:t>
             </a:r>
           </a:p>
           <a:p xmlns:a="http://schemas.openxmlformats.org/drawingml/2006/main">
@@ -6160,7 +6679,7 @@
               <a:buNone/>
             </a:pPr>
             <a:r>
-              <a:t>Its values appear in the form.</a:t>
+              <a:t>Submit adds the returned item.</a:t>
             </a:r>
           </a:p>
         </p:txBody>
@@ -6193,7 +6712,7 @@
           <a:lstStyle xmlns:a="http://schemas.openxmlformats.org/drawingml/2006/main"/>
           <a:p xmlns:a="http://schemas.openxmlformats.org/drawingml/2006/main">
             <a:r>
-              <a:t>Step 4 Check</a:t>
+              <a:t>Step 2: What changed?</a:t>
             </a:r>
             <a:endParaRPr/>
           </a:p>
@@ -6204,7 +6723,7 @@
           <p:cNvPr id="4" name="">
             <a:extLst xmlns:a="http://schemas.openxmlformats.org/drawingml/2006/main">
               <a:ext uri="{FF2B5EF4-FFF2-40B4-BE49-F238E27FC236}">
-                <a16:creationId xmlns:a16="http://schemas.microsoft.com/office/drawing/2014/main" id="{B314F94A-CF4E-43FD-8746-3698A5FD8ADF}"/>
+                <a16:creationId xmlns:a16="http://schemas.microsoft.com/office/drawing/2014/main" id="{05B548D2-BD8B-4E00-8503-26FE83EF6BEB}"/>
               </a:ext>
             </a:extLst>
           </p:cNvPr>
@@ -6214,7 +6733,7 @@
           <p:nvPr/>
         </p:nvPicPr>
         <p:blipFill>
-          <a:blip xmlns:r="http://schemas.openxmlformats.org/officeDocument/2006/relationships" xmlns:a="http://schemas.openxmlformats.org/drawingml/2006/main" r:embed="R28ae653610934add"/>
+          <a:blip xmlns:r="http://schemas.openxmlformats.org/officeDocument/2006/relationships" xmlns:a="http://schemas.openxmlformats.org/drawingml/2006/main" r:embed="R6bb9702370824ad1"/>
           <a:stretch xmlns:a="http://schemas.openxmlformats.org/drawingml/2006/main"/>
         </p:blipFill>
         <p:spPr>
@@ -6230,7 +6749,7 @@
     </p:spTree>
     <p:extLst>
       <p:ext uri="{BB962C8B-B14F-4D97-AF65-F5344CB8AC3E}">
-        <p14:creationId xmlns:p14="http://schemas.microsoft.com/office/powerpoint/2010/main" val="2070601946"/>
+        <p14:creationId xmlns:p14="http://schemas.microsoft.com/office/powerpoint/2010/main" val="1171490894"/>
       </p:ext>
     </p:extLst>
   </p:cSld>
@@ -6254,7 +6773,7 @@
           <p:cNvPr id="2" name="Content Placeholder 2">
             <a:extLst xmlns:a="http://schemas.openxmlformats.org/drawingml/2006/main">
               <a:ext uri="{FF2B5EF4-FFF2-40B4-BE49-F238E27FC236}">
-                <a16:creationId xmlns:a16="http://schemas.microsoft.com/office/drawing/2014/main" id="{BD3AD6A2-01E0-4D2B-8055-F4378782B593}"/>
+                <a16:creationId xmlns:a16="http://schemas.microsoft.com/office/drawing/2014/main" id="{821D3FE4-0D83-46DD-A40C-9ACF503108E5}"/>
               </a:ext>
             </a:extLst>
           </p:cNvPr>
@@ -6274,7 +6793,7 @@
               <a:buNone/>
             </a:pPr>
             <a:r>
-              <a:t>Delete also receives the row item.</a:t>
+              <a:t>Each row has its own MaterialItem.</a:t>
             </a:r>
           </a:p>
           <a:p xmlns:a="http://schemas.openxmlformats.org/drawingml/2006/main">
@@ -6282,7 +6801,7 @@
               <a:buNone/>
             </a:pPr>
             <a:r>
-              <a:t>The page still asks for confirmation.</a:t>
+              <a:t>CommandParameter passes that item to Edit.</a:t>
             </a:r>
           </a:p>
         </p:txBody>
@@ -6315,7 +6834,7 @@
           <a:lstStyle xmlns:a="http://schemas.openxmlformats.org/drawingml/2006/main"/>
           <a:p xmlns:a="http://schemas.openxmlformats.org/drawingml/2006/main">
             <a:r>
-              <a:t>Step 5 Delete command</a:t>
+              <a:t>Step 4: CommandParameter</a:t>
             </a:r>
             <a:endParaRPr/>
           </a:p>
@@ -6324,7 +6843,7 @@
     </p:spTree>
     <p:extLst>
       <p:ext uri="{BB962C8B-B14F-4D97-AF65-F5344CB8AC3E}">
-        <p14:creationId xmlns:p14="http://schemas.microsoft.com/office/powerpoint/2010/main" val="1362600905"/>
+        <p14:creationId xmlns:p14="http://schemas.microsoft.com/office/powerpoint/2010/main" val="1168106707"/>
       </p:ext>
     </p:extLst>
   </p:cSld>
